--- a/Apresentação capítulo 5.pptx
+++ b/Apresentação capítulo 5.pptx
@@ -30,24 +30,23 @@
     <p:sldId id="275" r:id="rId26"/>
     <p:sldId id="276" r:id="rId27"/>
     <p:sldId id="277" r:id="rId28"/>
-    <p:sldId id="278" r:id="rId29"/>
   </p:sldIdLst>
   <p:sldSz cy="5143500" cx="9144000"/>
   <p:notesSz cx="6858000" cy="9144000"/>
   <p:embeddedFontLst>
     <p:embeddedFont>
       <p:font typeface="Montserrat"/>
-      <p:regular r:id="rId30"/>
-      <p:bold r:id="rId31"/>
-      <p:italic r:id="rId32"/>
-      <p:boldItalic r:id="rId33"/>
+      <p:regular r:id="rId29"/>
+      <p:bold r:id="rId30"/>
+      <p:italic r:id="rId31"/>
+      <p:boldItalic r:id="rId32"/>
     </p:embeddedFont>
     <p:embeddedFont>
       <p:font typeface="Lato"/>
-      <p:regular r:id="rId34"/>
-      <p:bold r:id="rId35"/>
-      <p:italic r:id="rId36"/>
-      <p:boldItalic r:id="rId37"/>
+      <p:regular r:id="rId33"/>
+      <p:bold r:id="rId34"/>
+      <p:italic r:id="rId35"/>
+      <p:boldItalic r:id="rId36"/>
     </p:embeddedFont>
   </p:embeddedFontLst>
   <p:defaultTextStyle>
@@ -857,7 +856,7 @@
       </p:grpSpPr>
       <p:sp>
         <p:nvSpPr>
-          <p:cNvPr id="184" name="Google Shape;184;g3e2bbf5d5cd_10_5:notes"/>
+          <p:cNvPr id="184" name="Google Shape;184;g3e2bb048649_0_145:notes"/>
           <p:cNvSpPr/>
           <p:nvPr>
             <p:ph idx="2" type="sldImg"/>
@@ -892,7 +891,7 @@
       </p:sp>
       <p:sp>
         <p:nvSpPr>
-          <p:cNvPr id="185" name="Google Shape;185;g3e2bbf5d5cd_10_5:notes"/>
+          <p:cNvPr id="185" name="Google Shape;185;g3e2bb048649_0_145:notes"/>
           <p:cNvSpPr txBox="1"/>
           <p:nvPr>
             <p:ph idx="1" type="body"/>
@@ -956,7 +955,7 @@
       </p:grpSpPr>
       <p:sp>
         <p:nvSpPr>
-          <p:cNvPr id="190" name="Google Shape;190;g3e2bb048649_0_145:notes"/>
+          <p:cNvPr id="190" name="Google Shape;190;g3e2bbf5d5cd_10_15:notes"/>
           <p:cNvSpPr/>
           <p:nvPr>
             <p:ph idx="2" type="sldImg"/>
@@ -991,7 +990,7 @@
       </p:sp>
       <p:sp>
         <p:nvSpPr>
-          <p:cNvPr id="191" name="Google Shape;191;g3e2bb048649_0_145:notes"/>
+          <p:cNvPr id="191" name="Google Shape;191;g3e2bbf5d5cd_10_15:notes"/>
           <p:cNvSpPr txBox="1"/>
           <p:nvPr>
             <p:ph idx="1" type="body"/>
@@ -1055,7 +1054,7 @@
       </p:grpSpPr>
       <p:sp>
         <p:nvSpPr>
-          <p:cNvPr id="196" name="Google Shape;196;g3e2bbf5d5cd_10_15:notes"/>
+          <p:cNvPr id="196" name="Google Shape;196;g3e2bbf5d5cd_10_20:notes"/>
           <p:cNvSpPr/>
           <p:nvPr>
             <p:ph idx="2" type="sldImg"/>
@@ -1090,7 +1089,7 @@
       </p:sp>
       <p:sp>
         <p:nvSpPr>
-          <p:cNvPr id="197" name="Google Shape;197;g3e2bbf5d5cd_10_15:notes"/>
+          <p:cNvPr id="197" name="Google Shape;197;g3e2bbf5d5cd_10_20:notes"/>
           <p:cNvSpPr txBox="1"/>
           <p:nvPr>
             <p:ph idx="1" type="body"/>
@@ -1154,7 +1153,7 @@
       </p:grpSpPr>
       <p:sp>
         <p:nvSpPr>
-          <p:cNvPr id="202" name="Google Shape;202;g3e2bbf5d5cd_10_20:notes"/>
+          <p:cNvPr id="202" name="Google Shape;202;g3e2bbf5d5cd_10_25:notes"/>
           <p:cNvSpPr/>
           <p:nvPr>
             <p:ph idx="2" type="sldImg"/>
@@ -1189,7 +1188,7 @@
       </p:sp>
       <p:sp>
         <p:nvSpPr>
-          <p:cNvPr id="203" name="Google Shape;203;g3e2bbf5d5cd_10_20:notes"/>
+          <p:cNvPr id="203" name="Google Shape;203;g3e2bbf5d5cd_10_25:notes"/>
           <p:cNvSpPr txBox="1"/>
           <p:nvPr>
             <p:ph idx="1" type="body"/>
@@ -1253,7 +1252,7 @@
       </p:grpSpPr>
       <p:sp>
         <p:nvSpPr>
-          <p:cNvPr id="208" name="Google Shape;208;g3e2bbf5d5cd_10_25:notes"/>
+          <p:cNvPr id="208" name="Google Shape;208;g3e2bbf5d5cd_10_30:notes"/>
           <p:cNvSpPr/>
           <p:nvPr>
             <p:ph idx="2" type="sldImg"/>
@@ -1288,7 +1287,7 @@
       </p:sp>
       <p:sp>
         <p:nvSpPr>
-          <p:cNvPr id="209" name="Google Shape;209;g3e2bbf5d5cd_10_25:notes"/>
+          <p:cNvPr id="209" name="Google Shape;209;g3e2bbf5d5cd_10_30:notes"/>
           <p:cNvSpPr txBox="1"/>
           <p:nvPr>
             <p:ph idx="1" type="body"/>
@@ -1352,7 +1351,7 @@
       </p:grpSpPr>
       <p:sp>
         <p:nvSpPr>
-          <p:cNvPr id="214" name="Google Shape;214;g3e2bbf5d5cd_10_30:notes"/>
+          <p:cNvPr id="214" name="Google Shape;214;g3e2bbf5d5cd_10_35:notes"/>
           <p:cNvSpPr/>
           <p:nvPr>
             <p:ph idx="2" type="sldImg"/>
@@ -1387,7 +1386,7 @@
       </p:sp>
       <p:sp>
         <p:nvSpPr>
-          <p:cNvPr id="215" name="Google Shape;215;g3e2bbf5d5cd_10_30:notes"/>
+          <p:cNvPr id="215" name="Google Shape;215;g3e2bbf5d5cd_10_35:notes"/>
           <p:cNvSpPr txBox="1"/>
           <p:nvPr>
             <p:ph idx="1" type="body"/>
@@ -1451,7 +1450,7 @@
       </p:grpSpPr>
       <p:sp>
         <p:nvSpPr>
-          <p:cNvPr id="220" name="Google Shape;220;g3e2bbf5d5cd_10_35:notes"/>
+          <p:cNvPr id="220" name="Google Shape;220;g3e2bbf5d5cd_10_40:notes"/>
           <p:cNvSpPr/>
           <p:nvPr>
             <p:ph idx="2" type="sldImg"/>
@@ -1486,7 +1485,7 @@
       </p:sp>
       <p:sp>
         <p:nvSpPr>
-          <p:cNvPr id="221" name="Google Shape;221;g3e2bbf5d5cd_10_35:notes"/>
+          <p:cNvPr id="221" name="Google Shape;221;g3e2bbf5d5cd_10_40:notes"/>
           <p:cNvSpPr txBox="1"/>
           <p:nvPr>
             <p:ph idx="1" type="body"/>
@@ -1550,7 +1549,7 @@
       </p:grpSpPr>
       <p:sp>
         <p:nvSpPr>
-          <p:cNvPr id="226" name="Google Shape;226;g3e2bbf5d5cd_10_40:notes"/>
+          <p:cNvPr id="226" name="Google Shape;226;g3e2bbf5d5cd_10_45:notes"/>
           <p:cNvSpPr/>
           <p:nvPr>
             <p:ph idx="2" type="sldImg"/>
@@ -1585,7 +1584,7 @@
       </p:sp>
       <p:sp>
         <p:nvSpPr>
-          <p:cNvPr id="227" name="Google Shape;227;g3e2bbf5d5cd_10_40:notes"/>
+          <p:cNvPr id="227" name="Google Shape;227;g3e2bbf5d5cd_10_45:notes"/>
           <p:cNvSpPr txBox="1"/>
           <p:nvPr>
             <p:ph idx="1" type="body"/>
@@ -1649,7 +1648,7 @@
       </p:grpSpPr>
       <p:sp>
         <p:nvSpPr>
-          <p:cNvPr id="232" name="Google Shape;232;g3e2bbf5d5cd_10_45:notes"/>
+          <p:cNvPr id="232" name="Google Shape;232;g3e2bbf5d5cd_10_10:notes"/>
           <p:cNvSpPr/>
           <p:nvPr>
             <p:ph idx="2" type="sldImg"/>
@@ -1684,7 +1683,7 @@
       </p:sp>
       <p:sp>
         <p:nvSpPr>
-          <p:cNvPr id="233" name="Google Shape;233;g3e2bbf5d5cd_10_45:notes"/>
+          <p:cNvPr id="233" name="Google Shape;233;g3e2bbf5d5cd_10_10:notes"/>
           <p:cNvSpPr txBox="1"/>
           <p:nvPr>
             <p:ph idx="1" type="body"/>
@@ -1748,7 +1747,7 @@
       </p:grpSpPr>
       <p:sp>
         <p:nvSpPr>
-          <p:cNvPr id="238" name="Google Shape;238;g3e2bbf5d5cd_10_10:notes"/>
+          <p:cNvPr id="238" name="Google Shape;238;g3e2bbf5d5cd_11_0:notes"/>
           <p:cNvSpPr/>
           <p:nvPr>
             <p:ph idx="2" type="sldImg"/>
@@ -1783,7 +1782,7 @@
       </p:sp>
       <p:sp>
         <p:nvSpPr>
-          <p:cNvPr id="239" name="Google Shape;239;g3e2bbf5d5cd_10_10:notes"/>
+          <p:cNvPr id="239" name="Google Shape;239;g3e2bbf5d5cd_11_0:notes"/>
           <p:cNvSpPr txBox="1"/>
           <p:nvPr>
             <p:ph idx="1" type="body"/>
@@ -1946,7 +1945,7 @@
       </p:grpSpPr>
       <p:sp>
         <p:nvSpPr>
-          <p:cNvPr id="244" name="Google Shape;244;g3e2bbf5d5cd_11_0:notes"/>
+          <p:cNvPr id="244" name="Google Shape;244;g3e2bbf5d5cd_11_5:notes"/>
           <p:cNvSpPr/>
           <p:nvPr>
             <p:ph idx="2" type="sldImg"/>
@@ -1981,7 +1980,7 @@
       </p:sp>
       <p:sp>
         <p:nvSpPr>
-          <p:cNvPr id="245" name="Google Shape;245;g3e2bbf5d5cd_11_0:notes"/>
+          <p:cNvPr id="245" name="Google Shape;245;g3e2bbf5d5cd_11_5:notes"/>
           <p:cNvSpPr txBox="1"/>
           <p:nvPr>
             <p:ph idx="1" type="body"/>
@@ -2045,7 +2044,7 @@
       </p:grpSpPr>
       <p:sp>
         <p:nvSpPr>
-          <p:cNvPr id="250" name="Google Shape;250;g3e2bbf5d5cd_11_5:notes"/>
+          <p:cNvPr id="250" name="Google Shape;250;g3e2bbf5d5cd_11_10:notes"/>
           <p:cNvSpPr/>
           <p:nvPr>
             <p:ph idx="2" type="sldImg"/>
@@ -2080,7 +2079,7 @@
       </p:sp>
       <p:sp>
         <p:nvSpPr>
-          <p:cNvPr id="251" name="Google Shape;251;g3e2bbf5d5cd_11_5:notes"/>
+          <p:cNvPr id="251" name="Google Shape;251;g3e2bbf5d5cd_11_10:notes"/>
           <p:cNvSpPr txBox="1"/>
           <p:nvPr>
             <p:ph idx="1" type="body"/>
@@ -2144,7 +2143,7 @@
       </p:grpSpPr>
       <p:sp>
         <p:nvSpPr>
-          <p:cNvPr id="256" name="Google Shape;256;g3e2bbf5d5cd_11_10:notes"/>
+          <p:cNvPr id="256" name="Google Shape;256;g3e2bbf5d5cd_11_15:notes"/>
           <p:cNvSpPr/>
           <p:nvPr>
             <p:ph idx="2" type="sldImg"/>
@@ -2179,106 +2178,7 @@
       </p:sp>
       <p:sp>
         <p:nvSpPr>
-          <p:cNvPr id="257" name="Google Shape;257;g3e2bbf5d5cd_11_10:notes"/>
-          <p:cNvSpPr txBox="1"/>
-          <p:nvPr>
-            <p:ph idx="1" type="body"/>
-          </p:nvPr>
-        </p:nvSpPr>
-        <p:spPr>
-          <a:xfrm>
-            <a:off x="685800" y="4343400"/>
-            <a:ext cx="5486400" cy="4114800"/>
-          </a:xfrm>
-          <a:prstGeom prst="rect">
-            <a:avLst/>
-          </a:prstGeom>
-        </p:spPr>
-        <p:txBody>
-          <a:bodyPr anchorCtr="0" anchor="t" bIns="91425" lIns="91425" spcFirstLastPara="1" rIns="91425" wrap="square" tIns="91425">
-            <a:noAutofit/>
-          </a:bodyPr>
-          <a:lstStyle/>
-          <a:p>
-            <a:pPr indent="0" lvl="0" marL="0" rtl="0" algn="l">
-              <a:spcBef>
-                <a:spcPts val="0"/>
-              </a:spcBef>
-              <a:spcAft>
-                <a:spcPts val="0"/>
-              </a:spcAft>
-              <a:buNone/>
-            </a:pPr>
-            <a:r>
-              <a:t/>
-            </a:r>
-            <a:endParaRPr/>
-          </a:p>
-        </p:txBody>
-      </p:sp>
-    </p:spTree>
-  </p:cSld>
-  <p:clrMapOvr>
-    <a:masterClrMapping/>
-  </p:clrMapOvr>
-</p:notes>
-</file>
-
-<file path=ppt/notesSlides/notesSlide23.xml><?xml version="1.0" encoding="utf-8"?>
-<p:notes xmlns:a="http://schemas.openxmlformats.org/drawingml/2006/main" xmlns:r="http://schemas.openxmlformats.org/officeDocument/2006/relationships" xmlns:mc="http://schemas.openxmlformats.org/markup-compatibility/2006" xmlns:mv="urn:schemas-microsoft-com:mac:vml" xmlns:p="http://schemas.openxmlformats.org/presentationml/2006/main" xmlns:c="http://schemas.openxmlformats.org/drawingml/2006/chart" xmlns:dgm="http://schemas.openxmlformats.org/drawingml/2006/diagram" xmlns:o="urn:schemas-microsoft-com:office:office" xmlns:v="urn:schemas-microsoft-com:vml" xmlns:pvml="urn:schemas-microsoft-com:office:powerpoint" xmlns:com="http://schemas.openxmlformats.org/drawingml/2006/compatibility" xmlns:p14="http://schemas.microsoft.com/office/powerpoint/2010/main" xmlns:p15="http://schemas.microsoft.com/office/powerpoint/2012/main" xmlns:ahyp="http://schemas.microsoft.com/office/drawing/2018/hyperlinkcolor" showMasterPhAnim="0" showMasterSp="0">
-  <p:cSld>
-    <p:spTree>
-      <p:nvGrpSpPr>
-        <p:cNvPr id="261" name="Shape 261"/>
-        <p:cNvGrpSpPr/>
-        <p:nvPr/>
-      </p:nvGrpSpPr>
-      <p:grpSpPr>
-        <a:xfrm>
-          <a:off x="0" y="0"/>
-          <a:ext cx="0" cy="0"/>
-          <a:chOff x="0" y="0"/>
-          <a:chExt cx="0" cy="0"/>
-        </a:xfrm>
-      </p:grpSpPr>
-      <p:sp>
-        <p:nvSpPr>
-          <p:cNvPr id="262" name="Google Shape;262;g3e2bbf5d5cd_11_15:notes"/>
-          <p:cNvSpPr/>
-          <p:nvPr>
-            <p:ph idx="2" type="sldImg"/>
-          </p:nvPr>
-        </p:nvSpPr>
-        <p:spPr>
-          <a:xfrm>
-            <a:off x="381300" y="685800"/>
-            <a:ext cx="6096000" cy="3429000"/>
-          </a:xfrm>
-          <a:custGeom>
-            <a:rect b="b" l="l" r="r" t="t"/>
-            <a:pathLst>
-              <a:path extrusionOk="0" h="120000" w="120000">
-                <a:moveTo>
-                  <a:pt x="0" y="0"/>
-                </a:moveTo>
-                <a:lnTo>
-                  <a:pt x="120000" y="0"/>
-                </a:lnTo>
-                <a:lnTo>
-                  <a:pt x="120000" y="120000"/>
-                </a:lnTo>
-                <a:lnTo>
-                  <a:pt x="0" y="120000"/>
-                </a:lnTo>
-                <a:close/>
-              </a:path>
-            </a:pathLst>
-          </a:custGeom>
-        </p:spPr>
-      </p:sp>
-      <p:sp>
-        <p:nvSpPr>
-          <p:cNvPr id="263" name="Google Shape;263;g3e2bbf5d5cd_11_15:notes"/>
+          <p:cNvPr id="257" name="Google Shape;257;g3e2bbf5d5cd_11_15:notes"/>
           <p:cNvSpPr txBox="1"/>
           <p:nvPr>
             <p:ph idx="1" type="body"/>
@@ -2936,7 +2836,7 @@
       </p:grpSpPr>
       <p:sp>
         <p:nvSpPr>
-          <p:cNvPr id="178" name="Google Shape;178;g3e2bbf5d5cd_4_6:notes"/>
+          <p:cNvPr id="178" name="Google Shape;178;g3e2bbf5d5cd_10_5:notes"/>
           <p:cNvSpPr/>
           <p:nvPr>
             <p:ph idx="2" type="sldImg"/>
@@ -2971,7 +2871,7 @@
       </p:sp>
       <p:sp>
         <p:nvSpPr>
-          <p:cNvPr id="179" name="Google Shape;179;g3e2bbf5d5cd_4_6:notes"/>
+          <p:cNvPr id="179" name="Google Shape;179;g3e2bbf5d5cd_10_5:notes"/>
           <p:cNvSpPr txBox="1"/>
           <p:nvPr>
             <p:ph idx="1" type="body"/>
@@ -11315,7 +11215,7 @@
             </a:pPr>
             <a:r>
               <a:rPr lang="pt-BR"/>
-              <a:t>Tamanho de contexto</a:t>
+              <a:t>Melhores práticas de prompting</a:t>
             </a:r>
             <a:endParaRPr/>
           </a:p>
@@ -11344,58 +11244,145 @@
           </a:bodyPr>
           <a:lstStyle/>
           <a:p>
+            <a:pPr indent="-311150" lvl="0" marL="457200" rtl="0" algn="l">
+              <a:spcBef>
+                <a:spcPts val="0"/>
+              </a:spcBef>
+              <a:spcAft>
+                <a:spcPts val="0"/>
+              </a:spcAft>
+              <a:buSzPts val="1300"/>
+              <a:buChar char="-"/>
+            </a:pPr>
+            <a:r>
+              <a:rPr lang="pt-BR"/>
+              <a:t>Escreva instruções explícitas e </a:t>
+            </a:r>
+            <a:r>
+              <a:rPr lang="pt-BR"/>
+              <a:t>concisas</a:t>
+            </a:r>
+            <a:r>
+              <a:rPr lang="pt-BR"/>
+              <a:t>.</a:t>
+            </a:r>
+            <a:endParaRPr/>
+          </a:p>
+          <a:p>
+            <a:pPr indent="-311150" lvl="0" marL="457200" rtl="0" algn="l">
+              <a:spcBef>
+                <a:spcPts val="0"/>
+              </a:spcBef>
+              <a:spcAft>
+                <a:spcPts val="0"/>
+              </a:spcAft>
+              <a:buSzPts val="1300"/>
+              <a:buChar char="-"/>
+            </a:pPr>
+            <a:r>
+              <a:rPr lang="pt-BR"/>
+              <a:t>Inclua contexto suficiente.</a:t>
+            </a:r>
+            <a:endParaRPr/>
+          </a:p>
+          <a:p>
+            <a:pPr indent="-311150" lvl="0" marL="457200" rtl="0" algn="l">
+              <a:spcBef>
+                <a:spcPts val="0"/>
+              </a:spcBef>
+              <a:spcAft>
+                <a:spcPts val="0"/>
+              </a:spcAft>
+              <a:buSzPts val="1300"/>
+              <a:buChar char="-"/>
+            </a:pPr>
+            <a:r>
+              <a:rPr lang="pt-BR"/>
+              <a:t>Quebre tarefas complexas em subtarefas.</a:t>
+            </a:r>
+            <a:endParaRPr/>
+          </a:p>
+          <a:p>
+            <a:pPr indent="-311150" lvl="0" marL="457200" rtl="0" algn="l">
+              <a:spcBef>
+                <a:spcPts val="0"/>
+              </a:spcBef>
+              <a:spcAft>
+                <a:spcPts val="0"/>
+              </a:spcAft>
+              <a:buSzPts val="1300"/>
+              <a:buChar char="-"/>
+            </a:pPr>
+            <a:r>
+              <a:rPr lang="pt-BR"/>
+              <a:t>Dê tempo para o modelo pensar (CoT).</a:t>
+            </a:r>
+            <a:endParaRPr/>
+          </a:p>
+          <a:p>
+            <a:pPr indent="-311150" lvl="0" marL="457200" rtl="0" algn="l">
+              <a:spcBef>
+                <a:spcPts val="0"/>
+              </a:spcBef>
+              <a:spcAft>
+                <a:spcPts val="0"/>
+              </a:spcAft>
+              <a:buSzPts val="1300"/>
+              <a:buChar char="-"/>
+            </a:pPr>
+            <a:r>
+              <a:rPr lang="pt-BR"/>
+              <a:t>Iterar seus prompts.</a:t>
+            </a:r>
+            <a:endParaRPr/>
+          </a:p>
+          <a:p>
+            <a:pPr indent="-311150" lvl="0" marL="457200" rtl="0" algn="l">
+              <a:spcBef>
+                <a:spcPts val="0"/>
+              </a:spcBef>
+              <a:spcAft>
+                <a:spcPts val="0"/>
+              </a:spcAft>
+              <a:buSzPts val="1300"/>
+              <a:buChar char="-"/>
+            </a:pPr>
+            <a:r>
+              <a:rPr lang="pt-BR"/>
+              <a:t>Avalie seus prompts com ferramentas.</a:t>
+            </a:r>
+            <a:endParaRPr/>
+          </a:p>
+          <a:p>
+            <a:pPr indent="-311150" lvl="0" marL="457200" rtl="0" algn="l">
+              <a:spcBef>
+                <a:spcPts val="0"/>
+              </a:spcBef>
+              <a:spcAft>
+                <a:spcPts val="0"/>
+              </a:spcAft>
+              <a:buSzPts val="1300"/>
+              <a:buChar char="-"/>
+            </a:pPr>
+            <a:r>
+              <a:rPr lang="pt-BR"/>
+              <a:t>Organize e versione prompts.</a:t>
+            </a:r>
+            <a:endParaRPr/>
+          </a:p>
+          <a:p>
             <a:pPr indent="0" lvl="0" marL="0" rtl="0" algn="l">
               <a:spcBef>
-                <a:spcPts val="0"/>
-              </a:spcBef>
-              <a:spcAft>
                 <a:spcPts val="1200"/>
+              </a:spcBef>
+              <a:spcAft>
+                <a:spcPts val="1200"/>
               </a:spcAft>
               <a:buNone/>
             </a:pPr>
             <a:r>
               <a:rPr lang="pt-BR"/>
-              <a:t>O tamanho do contexto representa quanta informação pode ser adicionada no prompt.</a:t>
-            </a:r>
-            <a:br>
-              <a:rPr lang="pt-BR"/>
-            </a:br>
-            <a:br>
-              <a:rPr lang="pt-BR"/>
-            </a:br>
-            <a:r>
-              <a:rPr lang="pt-BR"/>
-              <a:t>Contexto MAIOR -&gt; maior limite de resposta e maior limite para contexto.</a:t>
-            </a:r>
-            <a:br>
-              <a:rPr lang="pt-BR"/>
-            </a:br>
-            <a:br>
-              <a:rPr lang="pt-BR"/>
-            </a:br>
-            <a:r>
-              <a:rPr lang="pt-BR"/>
-              <a:t>O tamanho do contexto aumentou significativamente nos últimos anos.</a:t>
-            </a:r>
-            <a:br>
-              <a:rPr lang="pt-BR"/>
-            </a:br>
-            <a:br>
-              <a:rPr lang="pt-BR"/>
-            </a:br>
-            <a:r>
-              <a:rPr lang="pt-BR"/>
-              <a:t>"Pesquisas mostram que modelos são melhores no entendimento de instruções no início e no fim de um prompt"</a:t>
-            </a:r>
-            <a:br>
-              <a:rPr lang="pt-BR"/>
-            </a:br>
-            <a:br>
-              <a:rPr lang="pt-BR"/>
-            </a:br>
-            <a:r>
-              <a:rPr lang="pt-BR"/>
-              <a:t>"Se um contexto maior causa perda de performance, tente reduzir o seu prompt"</a:t>
+              <a:t>As técnicas acima são técnicas gerais que funcionam para vários modelos e vão continuar relevantes.</a:t>
             </a:r>
             <a:endParaRPr/>
           </a:p>
@@ -11460,7 +11447,7 @@
             </a:pPr>
             <a:r>
               <a:rPr lang="pt-BR"/>
-              <a:t>Melhores práticas de prompting</a:t>
+              <a:t>Escreva instruções explícitas e concisas</a:t>
             </a:r>
             <a:endParaRPr/>
           </a:p>
@@ -11501,15 +11488,32 @@
             </a:pPr>
             <a:r>
               <a:rPr lang="pt-BR"/>
-              <a:t>Escreva instruções explícitas e </a:t>
-            </a:r>
-            <a:r>
-              <a:rPr lang="pt-BR"/>
-              <a:t>concisas</a:t>
-            </a:r>
-            <a:r>
-              <a:rPr lang="pt-BR"/>
-              <a:t>.</a:t>
+              <a:t>Explique sem ambiguidade o que você quer</a:t>
+            </a:r>
+            <a:endParaRPr/>
+          </a:p>
+          <a:p>
+            <a:pPr indent="-298450" lvl="1" marL="914400" rtl="0" algn="l">
+              <a:spcBef>
+                <a:spcPts val="0"/>
+              </a:spcBef>
+              <a:spcAft>
+                <a:spcPts val="0"/>
+              </a:spcAft>
+              <a:buSzPts val="1100"/>
+              <a:buChar char="-"/>
+            </a:pPr>
+            <a:r>
+              <a:rPr lang="pt-BR"/>
+              <a:t>Se deseja utilizar um sistema de </a:t>
+            </a:r>
+            <a:r>
+              <a:rPr i="1" lang="pt-BR"/>
+              <a:t>Score</a:t>
+            </a:r>
+            <a:r>
+              <a:rPr lang="pt-BR"/>
+              <a:t>, explique como o cálculo deve funcionar</a:t>
             </a:r>
             <a:endParaRPr/>
           </a:p>
@@ -11526,7 +11530,24 @@
             </a:pPr>
             <a:r>
               <a:rPr lang="pt-BR"/>
-              <a:t>Inclua contexto suficiente.</a:t>
+              <a:t>Utilize personas</a:t>
+            </a:r>
+            <a:endParaRPr/>
+          </a:p>
+          <a:p>
+            <a:pPr indent="-298450" lvl="1" marL="914400" rtl="0" algn="l">
+              <a:spcBef>
+                <a:spcPts val="0"/>
+              </a:spcBef>
+              <a:spcAft>
+                <a:spcPts val="0"/>
+              </a:spcAft>
+              <a:buSzPts val="1100"/>
+              <a:buChar char="-"/>
+            </a:pPr>
+            <a:r>
+              <a:rPr lang="pt-BR"/>
+              <a:t>Explique a perspectiva pela qual a IA deve visualizar a tarefa.</a:t>
             </a:r>
             <a:endParaRPr/>
           </a:p>
@@ -11543,91 +11564,62 @@
             </a:pPr>
             <a:r>
               <a:rPr lang="pt-BR"/>
-              <a:t>Quebre tarefas complexas em subtarefas.</a:t>
+              <a:t>Dê exemplos</a:t>
             </a:r>
             <a:endParaRPr/>
           </a:p>
           <a:p>
-            <a:pPr indent="-311150" lvl="0" marL="457200" rtl="0" algn="l">
-              <a:spcBef>
-                <a:spcPts val="0"/>
-              </a:spcBef>
-              <a:spcAft>
-                <a:spcPts val="0"/>
-              </a:spcAft>
-              <a:buSzPts val="1300"/>
-              <a:buChar char="-"/>
+            <a:pPr indent="0" lvl="0" marL="0" rtl="0" algn="l">
+              <a:spcBef>
+                <a:spcPts val="1200"/>
+              </a:spcBef>
+              <a:spcAft>
+                <a:spcPts val="0"/>
+              </a:spcAft>
+              <a:buNone/>
             </a:pPr>
             <a:r>
               <a:rPr lang="pt-BR"/>
-              <a:t>Dê tempo para o modelo pensar (CoT).</a:t>
+              <a:t>Dicas:</a:t>
+            </a:r>
+            <a:br>
+              <a:rPr lang="pt-BR"/>
+            </a:br>
+            <a:r>
+              <a:rPr lang="pt-BR"/>
+              <a:t>Melhore seus prompts conforme percebe comportamentos indesejados.</a:t>
             </a:r>
             <a:endParaRPr/>
           </a:p>
           <a:p>
-            <a:pPr indent="-311150" lvl="0" marL="457200" rtl="0" algn="l">
-              <a:spcBef>
-                <a:spcPts val="0"/>
-              </a:spcBef>
-              <a:spcAft>
-                <a:spcPts val="0"/>
-              </a:spcAft>
-              <a:buSzPts val="1300"/>
-              <a:buChar char="-"/>
+            <a:pPr indent="0" lvl="0" marL="0" rtl="0" algn="l">
+              <a:spcBef>
+                <a:spcPts val="1200"/>
+              </a:spcBef>
+              <a:spcAft>
+                <a:spcPts val="0"/>
+              </a:spcAft>
+              <a:buNone/>
             </a:pPr>
             <a:r>
               <a:rPr lang="pt-BR"/>
-              <a:t>Iterar seus prompts.</a:t>
+              <a:t>Se desejar uma resposta concisa, diga isso ao modelo.</a:t>
             </a:r>
             <a:endParaRPr/>
           </a:p>
           <a:p>
-            <a:pPr indent="-311150" lvl="0" marL="457200" rtl="0" algn="l">
-              <a:spcBef>
-                <a:spcPts val="0"/>
-              </a:spcBef>
-              <a:spcAft>
-                <a:spcPts val="0"/>
-              </a:spcAft>
-              <a:buSzPts val="1300"/>
-              <a:buChar char="-"/>
+            <a:pPr indent="0" lvl="0" marL="0" rtl="0" algn="l">
+              <a:spcBef>
+                <a:spcPts val="1200"/>
+              </a:spcBef>
+              <a:spcAft>
+                <a:spcPts val="1200"/>
+              </a:spcAft>
+              <a:buNone/>
             </a:pPr>
             <a:r>
               <a:rPr lang="pt-BR"/>
-              <a:t>Avalie seus prompts com ferramentas.</a:t>
-            </a:r>
-            <a:endParaRPr/>
-          </a:p>
-          <a:p>
-            <a:pPr indent="-311150" lvl="0" marL="457200" rtl="0" algn="l">
-              <a:spcBef>
-                <a:spcPts val="0"/>
-              </a:spcBef>
-              <a:spcAft>
-                <a:spcPts val="0"/>
-              </a:spcAft>
-              <a:buSzPts val="1300"/>
-              <a:buChar char="-"/>
-            </a:pPr>
-            <a:r>
-              <a:rPr lang="pt-BR"/>
-              <a:t>Organize e versione prompts.</a:t>
-            </a:r>
-            <a:endParaRPr/>
-          </a:p>
-          <a:p>
-            <a:pPr indent="0" lvl="0" marL="0" rtl="0" algn="l">
-              <a:spcBef>
-                <a:spcPts val="1200"/>
-              </a:spcBef>
-              <a:spcAft>
-                <a:spcPts val="1200"/>
-              </a:spcAft>
-              <a:buNone/>
-            </a:pPr>
-            <a:r>
-              <a:rPr lang="pt-BR"/>
-              <a:t>As técnicas acima são técnicas gerais que funcionam para vários modelos e vão continuar relevantes.</a:t>
+              <a:t>Para tarefas esperando saídas estruturadas utilize marcadores para delimitar onde a saída se inicia.</a:t>
             </a:r>
             <a:endParaRPr/>
           </a:p>
@@ -11692,7 +11684,7 @@
             </a:pPr>
             <a:r>
               <a:rPr lang="pt-BR"/>
-              <a:t>Escreva instruções explícitas e concisas</a:t>
+              <a:t>Inclua contexto suficiente</a:t>
             </a:r>
             <a:endParaRPr/>
           </a:p>
@@ -11721,150 +11713,64 @@
           </a:bodyPr>
           <a:lstStyle/>
           <a:p>
-            <a:pPr indent="-311150" lvl="0" marL="457200" rtl="0" algn="l">
-              <a:spcBef>
-                <a:spcPts val="0"/>
-              </a:spcBef>
-              <a:spcAft>
-                <a:spcPts val="0"/>
-              </a:spcAft>
-              <a:buSzPts val="1300"/>
-              <a:buChar char="-"/>
+            <a:pPr indent="0" lvl="0" marL="0" rtl="0" algn="l">
+              <a:spcBef>
+                <a:spcPts val="0"/>
+              </a:spcBef>
+              <a:spcAft>
+                <a:spcPts val="0"/>
+              </a:spcAft>
+              <a:buNone/>
             </a:pPr>
             <a:r>
               <a:rPr lang="pt-BR"/>
-              <a:t>Explique sem ambiguidade o que você quer</a:t>
+              <a:t>Ter a informação necessária para resolver um problema melhora a performance do modelo e auxilia na redução de </a:t>
+            </a:r>
+            <a:r>
+              <a:rPr lang="pt-BR"/>
+              <a:t>alucinações.</a:t>
             </a:r>
             <a:endParaRPr/>
           </a:p>
           <a:p>
-            <a:pPr indent="-298450" lvl="1" marL="914400" rtl="0" algn="l">
-              <a:spcBef>
-                <a:spcPts val="0"/>
-              </a:spcBef>
-              <a:spcAft>
-                <a:spcPts val="0"/>
-              </a:spcAft>
-              <a:buSzPts val="1100"/>
-              <a:buChar char="-"/>
+            <a:pPr indent="0" lvl="0" marL="0" rtl="0" algn="l">
+              <a:spcBef>
+                <a:spcPts val="1200"/>
+              </a:spcBef>
+              <a:spcAft>
+                <a:spcPts val="0"/>
+              </a:spcAft>
+              <a:buNone/>
             </a:pPr>
             <a:r>
               <a:rPr lang="pt-BR"/>
-              <a:t>Se deseja utilizar um sistema de </a:t>
-            </a:r>
-            <a:r>
-              <a:rPr i="1" lang="pt-BR"/>
-              <a:t>Score</a:t>
-            </a:r>
-            <a:r>
-              <a:rPr lang="pt-BR"/>
-              <a:t>, explique como o cálculo deve funcionar</a:t>
+              <a:t>"Se um modelo deve responder a um artigo, incluir o artigo no contexto pode melhorar consideravelmente a performance, …, caso o modelo não receba o contexto necessário ele pode acabar utilizando apenas o seu conhecimento interno, o que pode causar mais alucinações"</a:t>
             </a:r>
             <a:endParaRPr/>
           </a:p>
           <a:p>
-            <a:pPr indent="-311150" lvl="0" marL="457200" rtl="0" algn="l">
-              <a:spcBef>
-                <a:spcPts val="0"/>
-              </a:spcBef>
-              <a:spcAft>
-                <a:spcPts val="0"/>
-              </a:spcAft>
-              <a:buSzPts val="1300"/>
-              <a:buChar char="-"/>
+            <a:pPr indent="0" lvl="0" marL="0" rtl="0" algn="l">
+              <a:spcBef>
+                <a:spcPts val="1200"/>
+              </a:spcBef>
+              <a:spcAft>
+                <a:spcPts val="1200"/>
+              </a:spcAft>
+              <a:buNone/>
             </a:pPr>
             <a:r>
               <a:rPr lang="pt-BR"/>
-              <a:t>Utilize personas</a:t>
-            </a:r>
-            <a:endParaRPr/>
-          </a:p>
-          <a:p>
-            <a:pPr indent="-298450" lvl="1" marL="914400" rtl="0" algn="l">
-              <a:spcBef>
-                <a:spcPts val="0"/>
-              </a:spcBef>
-              <a:spcAft>
-                <a:spcPts val="0"/>
-              </a:spcAft>
-              <a:buSzPts val="1100"/>
-              <a:buChar char="-"/>
-            </a:pPr>
-            <a:r>
-              <a:rPr lang="pt-BR"/>
-              <a:t>Explique a perspectiva pela qual a IA deve visualizar a tarefa.</a:t>
-            </a:r>
-            <a:endParaRPr/>
-          </a:p>
-          <a:p>
-            <a:pPr indent="-311150" lvl="0" marL="457200" rtl="0" algn="l">
-              <a:spcBef>
-                <a:spcPts val="0"/>
-              </a:spcBef>
-              <a:spcAft>
-                <a:spcPts val="0"/>
-              </a:spcAft>
-              <a:buSzPts val="1300"/>
-              <a:buChar char="-"/>
-            </a:pPr>
-            <a:r>
-              <a:rPr lang="pt-BR"/>
-              <a:t>Dê exemplos</a:t>
-            </a:r>
-            <a:endParaRPr/>
-          </a:p>
-          <a:p>
-            <a:pPr indent="0" lvl="0" marL="0" rtl="0" algn="l">
-              <a:spcBef>
-                <a:spcPts val="1200"/>
-              </a:spcBef>
-              <a:spcAft>
-                <a:spcPts val="0"/>
-              </a:spcAft>
-              <a:buNone/>
-            </a:pPr>
-            <a:r>
-              <a:rPr lang="pt-BR"/>
-              <a:t>Dicas:</a:t>
+              <a:t>O processo de coleta do contexto necessário é chamado de construção de contexto.</a:t>
             </a:r>
             <a:br>
               <a:rPr lang="pt-BR"/>
             </a:br>
-            <a:r>
-              <a:rPr lang="pt-BR"/>
-              <a:t>Melhore seus prompts conforme percebe comportamentos indesejados.</a:t>
-            </a:r>
-            <a:endParaRPr/>
-          </a:p>
-          <a:p>
-            <a:pPr indent="0" lvl="0" marL="0" rtl="0" algn="l">
-              <a:spcBef>
-                <a:spcPts val="1200"/>
-              </a:spcBef>
-              <a:spcAft>
-                <a:spcPts val="0"/>
-              </a:spcAft>
-              <a:buNone/>
-            </a:pPr>
-            <a:r>
-              <a:rPr lang="pt-BR"/>
-              <a:t>Se desejar uma resposta concisa, diga isso ao modelo.</a:t>
-            </a:r>
-            <a:endParaRPr/>
-          </a:p>
-          <a:p>
-            <a:pPr indent="0" lvl="0" marL="0" rtl="0" algn="l">
-              <a:spcBef>
-                <a:spcPts val="1200"/>
-              </a:spcBef>
-              <a:spcAft>
-                <a:spcPts val="1200"/>
-              </a:spcAft>
-              <a:buNone/>
-            </a:pPr>
-            <a:r>
-              <a:rPr lang="pt-BR"/>
-              <a:t>Para tarefas esperando saídas estruturadas utilize marcadores para delimitar onde a saída se inicia.</a:t>
+            <a:br>
+              <a:rPr lang="pt-BR"/>
+            </a:br>
+            <a:r>
+              <a:rPr lang="pt-BR"/>
+              <a:t>Ferramentas para construção de contexto são discutidas no Capítulo 6.</a:t>
             </a:r>
             <a:endParaRPr/>
           </a:p>
@@ -11929,7 +11835,7 @@
             </a:pPr>
             <a:r>
               <a:rPr lang="pt-BR"/>
-              <a:t>Inclua contexto suficiente</a:t>
+              <a:t>Quebre tarefas complexas em subtarefas</a:t>
             </a:r>
             <a:endParaRPr/>
           </a:p>
@@ -11958,64 +11864,189 @@
           </a:bodyPr>
           <a:lstStyle/>
           <a:p>
-            <a:pPr indent="0" lvl="0" marL="0" rtl="0" algn="l">
-              <a:spcBef>
-                <a:spcPts val="0"/>
-              </a:spcBef>
-              <a:spcAft>
-                <a:spcPts val="0"/>
-              </a:spcAft>
-              <a:buNone/>
+            <a:pPr indent="-311150" lvl="0" marL="457200" rtl="0" algn="l">
+              <a:spcBef>
+                <a:spcPts val="0"/>
+              </a:spcBef>
+              <a:spcAft>
+                <a:spcPts val="0"/>
+              </a:spcAft>
+              <a:buSzPts val="1300"/>
+              <a:buChar char="-"/>
             </a:pPr>
             <a:r>
               <a:rPr lang="pt-BR"/>
-              <a:t>Ter a informação necessária para resolver um problema melhora a performance do modelo e auxilia na redução de </a:t>
-            </a:r>
-            <a:r>
-              <a:rPr lang="pt-BR"/>
-              <a:t>alucinações.</a:t>
+              <a:t>Separar um grande prompt com várias etapas em vários prompts.</a:t>
             </a:r>
             <a:endParaRPr/>
           </a:p>
           <a:p>
-            <a:pPr indent="0" lvl="0" marL="0" rtl="0" algn="l">
-              <a:spcBef>
-                <a:spcPts val="1200"/>
-              </a:spcBef>
-              <a:spcAft>
-                <a:spcPts val="0"/>
-              </a:spcAft>
-              <a:buNone/>
+            <a:pPr indent="-311150" lvl="0" marL="457200" rtl="0" algn="l">
+              <a:spcBef>
+                <a:spcPts val="0"/>
+              </a:spcBef>
+              <a:spcAft>
+                <a:spcPts val="0"/>
+              </a:spcAft>
+              <a:buSzPts val="1300"/>
+              <a:buChar char="-"/>
             </a:pPr>
             <a:r>
               <a:rPr lang="pt-BR"/>
-              <a:t>"Se um modelo deve responder a um artigo, incluir o artigo no contexto pode melhorar consideravelmente a performance, …, caso o modelo não receba o contexto necessário ele pode acabar utilizando apenas o seu conhecimento interno, o que pode causar mais alucinações"</a:t>
+              <a:t>Modelos ainda são melhores em entender instruções simples.</a:t>
             </a:r>
             <a:endParaRPr/>
           </a:p>
           <a:p>
-            <a:pPr indent="0" lvl="0" marL="0" rtl="0" algn="l">
-              <a:spcBef>
-                <a:spcPts val="1200"/>
-              </a:spcBef>
-              <a:spcAft>
-                <a:spcPts val="1200"/>
-              </a:spcAft>
-              <a:buNone/>
+            <a:pPr indent="-311150" lvl="0" marL="457200" rtl="0" algn="l">
+              <a:spcBef>
+                <a:spcPts val="0"/>
+              </a:spcBef>
+              <a:spcAft>
+                <a:spcPts val="0"/>
+              </a:spcAft>
+              <a:buSzPts val="1300"/>
+              <a:buChar char="-"/>
             </a:pPr>
             <a:r>
               <a:rPr lang="pt-BR"/>
-              <a:t>O processo de coleta do contexto necessário é chamado de construção de contexto.</a:t>
-            </a:r>
-            <a:br>
-              <a:rPr lang="pt-BR"/>
-            </a:br>
-            <a:br>
-              <a:rPr lang="pt-BR"/>
-            </a:br>
-            <a:r>
-              <a:rPr lang="pt-BR"/>
-              <a:t>Ferramentas para construção de contexto são discutidas no Capítulo 6.</a:t>
+              <a:t>Vantagens</a:t>
+            </a:r>
+            <a:endParaRPr/>
+          </a:p>
+          <a:p>
+            <a:pPr indent="-298450" lvl="1" marL="914400" rtl="0" algn="l">
+              <a:spcBef>
+                <a:spcPts val="0"/>
+              </a:spcBef>
+              <a:spcAft>
+                <a:spcPts val="0"/>
+              </a:spcAft>
+              <a:buSzPts val="1100"/>
+              <a:buChar char="-"/>
+            </a:pPr>
+            <a:r>
+              <a:rPr lang="pt-BR"/>
+              <a:t>Performance melhor</a:t>
+            </a:r>
+            <a:endParaRPr/>
+          </a:p>
+          <a:p>
+            <a:pPr indent="-298450" lvl="1" marL="914400" rtl="0" algn="l">
+              <a:spcBef>
+                <a:spcPts val="0"/>
+              </a:spcBef>
+              <a:spcAft>
+                <a:spcPts val="0"/>
+              </a:spcAft>
+              <a:buSzPts val="1100"/>
+              <a:buChar char="-"/>
+            </a:pPr>
+            <a:r>
+              <a:rPr lang="pt-BR"/>
+              <a:t>Monitoração</a:t>
+            </a:r>
+            <a:endParaRPr/>
+          </a:p>
+          <a:p>
+            <a:pPr indent="-298450" lvl="1" marL="914400" rtl="0" algn="l">
+              <a:spcBef>
+                <a:spcPts val="0"/>
+              </a:spcBef>
+              <a:spcAft>
+                <a:spcPts val="0"/>
+              </a:spcAft>
+              <a:buSzPts val="1100"/>
+              <a:buChar char="-"/>
+            </a:pPr>
+            <a:r>
+              <a:rPr lang="pt-BR"/>
+              <a:t>Debug</a:t>
+            </a:r>
+            <a:endParaRPr/>
+          </a:p>
+          <a:p>
+            <a:pPr indent="-298450" lvl="1" marL="914400" rtl="0" algn="l">
+              <a:spcBef>
+                <a:spcPts val="0"/>
+              </a:spcBef>
+              <a:spcAft>
+                <a:spcPts val="0"/>
+              </a:spcAft>
+              <a:buSzPts val="1100"/>
+              <a:buChar char="-"/>
+            </a:pPr>
+            <a:r>
+              <a:rPr lang="pt-BR"/>
+              <a:t>Paralelização</a:t>
+            </a:r>
+            <a:endParaRPr/>
+          </a:p>
+          <a:p>
+            <a:pPr indent="-298450" lvl="1" marL="914400" rtl="0" algn="l">
+              <a:spcBef>
+                <a:spcPts val="0"/>
+              </a:spcBef>
+              <a:spcAft>
+                <a:spcPts val="0"/>
+              </a:spcAft>
+              <a:buSzPts val="1100"/>
+              <a:buChar char="-"/>
+            </a:pPr>
+            <a:r>
+              <a:rPr lang="pt-BR"/>
+              <a:t>Esforço menor</a:t>
+            </a:r>
+            <a:endParaRPr/>
+          </a:p>
+          <a:p>
+            <a:pPr indent="-311150" lvl="0" marL="457200" rtl="0" algn="l">
+              <a:spcBef>
+                <a:spcPts val="0"/>
+              </a:spcBef>
+              <a:spcAft>
+                <a:spcPts val="0"/>
+              </a:spcAft>
+              <a:buSzPts val="1300"/>
+              <a:buChar char="-"/>
+            </a:pPr>
+            <a:r>
+              <a:rPr lang="pt-BR"/>
+              <a:t>Desvantagens</a:t>
+            </a:r>
+            <a:endParaRPr/>
+          </a:p>
+          <a:p>
+            <a:pPr indent="-298450" lvl="1" marL="914400" rtl="0" algn="l">
+              <a:spcBef>
+                <a:spcPts val="0"/>
+              </a:spcBef>
+              <a:spcAft>
+                <a:spcPts val="0"/>
+              </a:spcAft>
+              <a:buSzPts val="1100"/>
+              <a:buChar char="-"/>
+            </a:pPr>
+            <a:r>
+              <a:rPr lang="pt-BR"/>
+              <a:t>Latência maior</a:t>
+            </a:r>
+            <a:endParaRPr/>
+          </a:p>
+          <a:p>
+            <a:pPr indent="-298450" lvl="1" marL="914400" rtl="0" algn="l">
+              <a:spcBef>
+                <a:spcPts val="0"/>
+              </a:spcBef>
+              <a:spcAft>
+                <a:spcPts val="0"/>
+              </a:spcAft>
+              <a:buSzPts val="1100"/>
+              <a:buChar char="-"/>
+            </a:pPr>
+            <a:r>
+              <a:rPr lang="pt-BR"/>
+              <a:t>Complexidade maior</a:t>
             </a:r>
             <a:endParaRPr/>
           </a:p>
@@ -12080,7 +12111,7 @@
             </a:pPr>
             <a:r>
               <a:rPr lang="pt-BR"/>
-              <a:t>Quebre tarefas complexas em subtarefas</a:t>
+              <a:t>Dê tempo para o modelo pensar</a:t>
             </a:r>
             <a:endParaRPr/>
           </a:p>
@@ -12109,189 +12140,79 @@
           </a:bodyPr>
           <a:lstStyle/>
           <a:p>
-            <a:pPr indent="-311150" lvl="0" marL="457200" rtl="0" algn="l">
-              <a:spcBef>
-                <a:spcPts val="0"/>
-              </a:spcBef>
-              <a:spcAft>
-                <a:spcPts val="0"/>
-              </a:spcAft>
-              <a:buSzPts val="1300"/>
-              <a:buChar char="-"/>
+            <a:pPr indent="0" lvl="0" marL="0" rtl="0" algn="l">
+              <a:spcBef>
+                <a:spcPts val="0"/>
+              </a:spcBef>
+              <a:spcAft>
+                <a:spcPts val="0"/>
+              </a:spcAft>
+              <a:buNone/>
             </a:pPr>
             <a:r>
-              <a:rPr lang="pt-BR"/>
-              <a:t>Separar um grande prompt com várias etapas em vários prompts.</a:t>
+              <a:rPr i="1" lang="pt-BR"/>
+              <a:t>Chain-of-thought</a:t>
+            </a:r>
+            <a:r>
+              <a:rPr lang="pt-BR"/>
+              <a:t>:</a:t>
+            </a:r>
+            <a:br>
+              <a:rPr lang="pt-BR"/>
+            </a:br>
+            <a:r>
+              <a:rPr lang="pt-BR"/>
+              <a:t>Exija um pensamento passo a passo ou motivo da decisão, isso faz com que o modelo pense mais profundamente sobre o problema.</a:t>
             </a:r>
             <a:endParaRPr/>
           </a:p>
           <a:p>
-            <a:pPr indent="-311150" lvl="0" marL="457200" rtl="0" algn="l">
-              <a:spcBef>
-                <a:spcPts val="0"/>
-              </a:spcBef>
-              <a:spcAft>
-                <a:spcPts val="0"/>
-              </a:spcAft>
-              <a:buSzPts val="1300"/>
-              <a:buChar char="-"/>
+            <a:pPr indent="0" lvl="0" marL="0" rtl="0" algn="l">
+              <a:spcBef>
+                <a:spcPts val="1200"/>
+              </a:spcBef>
+              <a:spcAft>
+                <a:spcPts val="0"/>
+              </a:spcAft>
+              <a:buNone/>
             </a:pPr>
             <a:r>
-              <a:rPr lang="pt-BR"/>
-              <a:t>Modelos ainda são melhores em entender instruções simples.</a:t>
+              <a:rPr i="1" lang="pt-BR"/>
+              <a:t>Self-critique</a:t>
+            </a:r>
+            <a:r>
+              <a:rPr lang="pt-BR"/>
+              <a:t>:</a:t>
+            </a:r>
+            <a:br>
+              <a:rPr lang="pt-BR"/>
+            </a:br>
+            <a:r>
+              <a:rPr lang="pt-BR"/>
+              <a:t>Exija que o modelo valide sua saída, também chamado de </a:t>
+            </a:r>
+            <a:r>
+              <a:rPr i="1" lang="pt-BR"/>
+              <a:t>self-eval</a:t>
+            </a:r>
+            <a:r>
+              <a:rPr lang="pt-BR"/>
+              <a:t>, faz o modelo pensar criticamente sobre o problema</a:t>
             </a:r>
             <a:endParaRPr/>
           </a:p>
           <a:p>
-            <a:pPr indent="-311150" lvl="0" marL="457200" rtl="0" algn="l">
-              <a:spcBef>
-                <a:spcPts val="0"/>
-              </a:spcBef>
-              <a:spcAft>
-                <a:spcPts val="0"/>
-              </a:spcAft>
-              <a:buSzPts val="1300"/>
-              <a:buChar char="-"/>
+            <a:pPr indent="0" lvl="0" marL="0" rtl="0" algn="l">
+              <a:spcBef>
+                <a:spcPts val="1200"/>
+              </a:spcBef>
+              <a:spcAft>
+                <a:spcPts val="1200"/>
+              </a:spcAft>
+              <a:buNone/>
             </a:pPr>
             <a:r>
-              <a:rPr lang="pt-BR"/>
-              <a:t>Vantagens</a:t>
-            </a:r>
-            <a:endParaRPr/>
-          </a:p>
-          <a:p>
-            <a:pPr indent="-298450" lvl="1" marL="914400" rtl="0" algn="l">
-              <a:spcBef>
-                <a:spcPts val="0"/>
-              </a:spcBef>
-              <a:spcAft>
-                <a:spcPts val="0"/>
-              </a:spcAft>
-              <a:buSzPts val="1100"/>
-              <a:buChar char="-"/>
-            </a:pPr>
-            <a:r>
-              <a:rPr lang="pt-BR"/>
-              <a:t>Performance melhor</a:t>
-            </a:r>
-            <a:endParaRPr/>
-          </a:p>
-          <a:p>
-            <a:pPr indent="-298450" lvl="1" marL="914400" rtl="0" algn="l">
-              <a:spcBef>
-                <a:spcPts val="0"/>
-              </a:spcBef>
-              <a:spcAft>
-                <a:spcPts val="0"/>
-              </a:spcAft>
-              <a:buSzPts val="1100"/>
-              <a:buChar char="-"/>
-            </a:pPr>
-            <a:r>
-              <a:rPr lang="pt-BR"/>
-              <a:t>Monitoração</a:t>
-            </a:r>
-            <a:endParaRPr/>
-          </a:p>
-          <a:p>
-            <a:pPr indent="-298450" lvl="1" marL="914400" rtl="0" algn="l">
-              <a:spcBef>
-                <a:spcPts val="0"/>
-              </a:spcBef>
-              <a:spcAft>
-                <a:spcPts val="0"/>
-              </a:spcAft>
-              <a:buSzPts val="1100"/>
-              <a:buChar char="-"/>
-            </a:pPr>
-            <a:r>
-              <a:rPr lang="pt-BR"/>
-              <a:t>Debug</a:t>
-            </a:r>
-            <a:endParaRPr/>
-          </a:p>
-          <a:p>
-            <a:pPr indent="-298450" lvl="1" marL="914400" rtl="0" algn="l">
-              <a:spcBef>
-                <a:spcPts val="0"/>
-              </a:spcBef>
-              <a:spcAft>
-                <a:spcPts val="0"/>
-              </a:spcAft>
-              <a:buSzPts val="1100"/>
-              <a:buChar char="-"/>
-            </a:pPr>
-            <a:r>
-              <a:rPr lang="pt-BR"/>
-              <a:t>Paralelização</a:t>
-            </a:r>
-            <a:endParaRPr/>
-          </a:p>
-          <a:p>
-            <a:pPr indent="-298450" lvl="1" marL="914400" rtl="0" algn="l">
-              <a:spcBef>
-                <a:spcPts val="0"/>
-              </a:spcBef>
-              <a:spcAft>
-                <a:spcPts val="0"/>
-              </a:spcAft>
-              <a:buSzPts val="1100"/>
-              <a:buChar char="-"/>
-            </a:pPr>
-            <a:r>
-              <a:rPr lang="pt-BR"/>
-              <a:t>Esforço menor</a:t>
-            </a:r>
-            <a:endParaRPr/>
-          </a:p>
-          <a:p>
-            <a:pPr indent="-311150" lvl="0" marL="457200" rtl="0" algn="l">
-              <a:spcBef>
-                <a:spcPts val="0"/>
-              </a:spcBef>
-              <a:spcAft>
-                <a:spcPts val="0"/>
-              </a:spcAft>
-              <a:buSzPts val="1300"/>
-              <a:buChar char="-"/>
-            </a:pPr>
-            <a:r>
-              <a:rPr lang="pt-BR"/>
-              <a:t>Desvantagens</a:t>
-            </a:r>
-            <a:endParaRPr/>
-          </a:p>
-          <a:p>
-            <a:pPr indent="-298450" lvl="1" marL="914400" rtl="0" algn="l">
-              <a:spcBef>
-                <a:spcPts val="0"/>
-              </a:spcBef>
-              <a:spcAft>
-                <a:spcPts val="0"/>
-              </a:spcAft>
-              <a:buSzPts val="1100"/>
-              <a:buChar char="-"/>
-            </a:pPr>
-            <a:r>
-              <a:rPr lang="pt-BR"/>
-              <a:t>Latência maior</a:t>
-            </a:r>
-            <a:endParaRPr/>
-          </a:p>
-          <a:p>
-            <a:pPr indent="-298450" lvl="1" marL="914400" rtl="0" algn="l">
-              <a:spcBef>
-                <a:spcPts val="0"/>
-              </a:spcBef>
-              <a:spcAft>
-                <a:spcPts val="0"/>
-              </a:spcAft>
-              <a:buSzPts val="1100"/>
-              <a:buChar char="-"/>
-            </a:pPr>
-            <a:r>
-              <a:rPr lang="pt-BR"/>
-              <a:t>Complexidade maior</a:t>
+              <a:t/>
             </a:r>
             <a:endParaRPr/>
           </a:p>
@@ -12356,7 +12277,7 @@
             </a:pPr>
             <a:r>
               <a:rPr lang="pt-BR"/>
-              <a:t>Dê tempo para o modelo pensar</a:t>
+              <a:t>Iterar seus prompts</a:t>
             </a:r>
             <a:endParaRPr/>
           </a:p>
@@ -12385,79 +12306,104 @@
           </a:bodyPr>
           <a:lstStyle/>
           <a:p>
-            <a:pPr indent="0" lvl="0" marL="0" rtl="0" algn="l">
-              <a:spcBef>
-                <a:spcPts val="0"/>
-              </a:spcBef>
-              <a:spcAft>
-                <a:spcPts val="0"/>
-              </a:spcAft>
-              <a:buNone/>
+            <a:pPr indent="-311150" lvl="0" marL="457200" rtl="0" algn="l">
+              <a:spcBef>
+                <a:spcPts val="0"/>
+              </a:spcBef>
+              <a:spcAft>
+                <a:spcPts val="0"/>
+              </a:spcAft>
+              <a:buSzPts val="1300"/>
+              <a:buChar char="-"/>
             </a:pPr>
             <a:r>
-              <a:rPr i="1" lang="pt-BR"/>
-              <a:t>Chain-of-thought</a:t>
-            </a:r>
-            <a:r>
-              <a:rPr lang="pt-BR"/>
-              <a:t>:</a:t>
-            </a:r>
-            <a:br>
-              <a:rPr lang="pt-BR"/>
-            </a:br>
-            <a:r>
-              <a:rPr lang="pt-BR"/>
-              <a:t>Exija um pensamento passo a passo ou motivo da decisão, isso faz com que o modelo pense mais profundamente sobre o problema.</a:t>
+              <a:rPr lang="pt-BR"/>
+              <a:t>Revise seus prompts conforme avalia os resultados gerados.</a:t>
             </a:r>
             <a:endParaRPr/>
           </a:p>
           <a:p>
-            <a:pPr indent="0" lvl="0" marL="0" rtl="0" algn="l">
-              <a:spcBef>
-                <a:spcPts val="1200"/>
-              </a:spcBef>
-              <a:spcAft>
-                <a:spcPts val="0"/>
-              </a:spcAft>
-              <a:buNone/>
+            <a:pPr indent="-298450" lvl="1" marL="914400" rtl="0" algn="l">
+              <a:spcBef>
+                <a:spcPts val="0"/>
+              </a:spcBef>
+              <a:spcAft>
+                <a:spcPts val="0"/>
+              </a:spcAft>
+              <a:buSzPts val="1100"/>
+              <a:buChar char="-"/>
             </a:pPr>
             <a:r>
-              <a:rPr i="1" lang="pt-BR"/>
-              <a:t>Self-critique</a:t>
-            </a:r>
-            <a:r>
-              <a:rPr lang="pt-BR"/>
-              <a:t>:</a:t>
-            </a:r>
-            <a:br>
-              <a:rPr lang="pt-BR"/>
-            </a:br>
-            <a:r>
-              <a:rPr lang="pt-BR"/>
-              <a:t>Exija que o modelo valide sua saída, também chamado de </a:t>
-            </a:r>
-            <a:r>
-              <a:rPr i="1" lang="pt-BR"/>
-              <a:t>self-eval</a:t>
-            </a:r>
-            <a:r>
-              <a:rPr lang="pt-BR"/>
-              <a:t>, faz o modelo pensar criticamente sobre o problema</a:t>
+              <a:rPr lang="pt-BR"/>
+              <a:t>Prompts diferentes</a:t>
             </a:r>
             <a:endParaRPr/>
           </a:p>
           <a:p>
-            <a:pPr indent="0" lvl="0" marL="0" rtl="0" algn="l">
-              <a:spcBef>
-                <a:spcPts val="1200"/>
-              </a:spcBef>
-              <a:spcAft>
-                <a:spcPts val="1200"/>
-              </a:spcAft>
-              <a:buNone/>
+            <a:pPr indent="-298450" lvl="1" marL="914400" rtl="0" algn="l">
+              <a:spcBef>
+                <a:spcPts val="0"/>
+              </a:spcBef>
+              <a:spcAft>
+                <a:spcPts val="0"/>
+              </a:spcAft>
+              <a:buSzPts val="1100"/>
+              <a:buChar char="-"/>
             </a:pPr>
             <a:r>
-              <a:t/>
+              <a:rPr lang="pt-BR"/>
+              <a:t>Modelos diferentes</a:t>
+            </a:r>
+            <a:endParaRPr/>
+          </a:p>
+          <a:p>
+            <a:pPr indent="-298450" lvl="1" marL="914400" rtl="0" algn="l">
+              <a:spcBef>
+                <a:spcPts val="0"/>
+              </a:spcBef>
+              <a:spcAft>
+                <a:spcPts val="0"/>
+              </a:spcAft>
+              <a:buSzPts val="1100"/>
+              <a:buChar char="-"/>
+            </a:pPr>
+            <a:r>
+              <a:rPr lang="pt-BR"/>
+              <a:t>Organize diferente</a:t>
+            </a:r>
+            <a:endParaRPr/>
+          </a:p>
+          <a:p>
+            <a:pPr indent="-311150" lvl="0" marL="457200" rtl="0" algn="l">
+              <a:spcBef>
+                <a:spcPts val="0"/>
+              </a:spcBef>
+              <a:spcAft>
+                <a:spcPts val="0"/>
+              </a:spcAft>
+              <a:buSzPts val="1300"/>
+              <a:buChar char="-"/>
+            </a:pPr>
+            <a:r>
+              <a:rPr lang="pt-BR"/>
+              <a:t>Estabeleça métricas padrões para comparar performance.</a:t>
+            </a:r>
+            <a:endParaRPr/>
+          </a:p>
+          <a:p>
+            <a:pPr indent="-311150" lvl="0" marL="457200" rtl="0" algn="l">
+              <a:spcBef>
+                <a:spcPts val="0"/>
+              </a:spcBef>
+              <a:spcAft>
+                <a:spcPts val="0"/>
+              </a:spcAft>
+              <a:buSzPts val="1300"/>
+              <a:buChar char="-"/>
+            </a:pPr>
+            <a:r>
+              <a:rPr lang="pt-BR"/>
+              <a:t>"Prompts devem ser avaliados em perspectiva de sistema, um prompt pode melhorar a performance de uma tarefa, mas piorar a performance do sistema."</a:t>
             </a:r>
             <a:endParaRPr/>
           </a:p>
@@ -12507,7 +12453,7 @@
         </p:spPr>
         <p:txBody>
           <a:bodyPr anchorCtr="0" anchor="t" bIns="91425" lIns="91425" spcFirstLastPara="1" rIns="91425" wrap="square" tIns="91425">
-            <a:normAutofit/>
+            <a:normAutofit fontScale="90000"/>
           </a:bodyPr>
           <a:lstStyle/>
           <a:p>
@@ -12522,7 +12468,7 @@
             </a:pPr>
             <a:r>
               <a:rPr lang="pt-BR"/>
-              <a:t>Iterar seus prompts</a:t>
+              <a:t>Avalie ferramentas de engenharia de prompt</a:t>
             </a:r>
             <a:endParaRPr/>
           </a:p>
@@ -12551,104 +12497,88 @@
           </a:bodyPr>
           <a:lstStyle/>
           <a:p>
-            <a:pPr indent="-311150" lvl="0" marL="457200" rtl="0" algn="l">
-              <a:spcBef>
-                <a:spcPts val="0"/>
-              </a:spcBef>
-              <a:spcAft>
-                <a:spcPts val="0"/>
-              </a:spcAft>
-              <a:buSzPts val="1300"/>
-              <a:buChar char="-"/>
+            <a:pPr indent="0" lvl="0" marL="0" rtl="0" algn="l">
+              <a:spcBef>
+                <a:spcPts val="0"/>
+              </a:spcBef>
+              <a:spcAft>
+                <a:spcPts val="0"/>
+              </a:spcAft>
+              <a:buNone/>
             </a:pPr>
             <a:r>
               <a:rPr lang="pt-BR"/>
-              <a:t>Revise seus prompts conforme avalia os resultados gerados.</a:t>
+              <a:t>Ferramentas que buscam otimizar prompts, buscam os prompts mais performáticos para realizar uma determinada tarefa a partir da especificação da entrada + saída que melhor se </a:t>
+            </a:r>
+            <a:r>
+              <a:rPr lang="pt-BR"/>
+              <a:t>adequa</a:t>
+            </a:r>
+            <a:r>
+              <a:rPr lang="pt-BR"/>
+              <a:t> a um determinado dataset de avaliação (Ex: OpenPrompt e DSPy).</a:t>
             </a:r>
             <a:endParaRPr/>
           </a:p>
           <a:p>
-            <a:pPr indent="-298450" lvl="1" marL="914400" rtl="0" algn="l">
-              <a:spcBef>
-                <a:spcPts val="0"/>
-              </a:spcBef>
-              <a:spcAft>
-                <a:spcPts val="0"/>
-              </a:spcAft>
-              <a:buSzPts val="1100"/>
-              <a:buChar char="-"/>
+            <a:pPr indent="0" lvl="0" marL="0" rtl="0" algn="l">
+              <a:spcBef>
+                <a:spcPts val="1200"/>
+              </a:spcBef>
+              <a:spcAft>
+                <a:spcPts val="0"/>
+              </a:spcAft>
+              <a:buNone/>
             </a:pPr>
             <a:r>
               <a:rPr lang="pt-BR"/>
-              <a:t>Prompts diferentes</a:t>
+              <a:t>Outra forma de criar e otimizar prompts é utilizar o próprio modelo, solicitando que ele crie, otimize ou critique seu prompt.</a:t>
             </a:r>
             <a:endParaRPr/>
           </a:p>
           <a:p>
-            <a:pPr indent="-298450" lvl="1" marL="914400" rtl="0" algn="l">
-              <a:spcBef>
-                <a:spcPts val="0"/>
-              </a:spcBef>
-              <a:spcAft>
-                <a:spcPts val="0"/>
-              </a:spcAft>
-              <a:buSzPts val="1100"/>
-              <a:buChar char="-"/>
+            <a:pPr indent="0" lvl="0" marL="0" rtl="0" algn="l">
+              <a:spcBef>
+                <a:spcPts val="1200"/>
+              </a:spcBef>
+              <a:spcAft>
+                <a:spcPts val="0"/>
+              </a:spcAft>
+              <a:buNone/>
             </a:pPr>
             <a:r>
               <a:rPr lang="pt-BR"/>
-              <a:t>Modelos diferentes</a:t>
+              <a:t>Deepmind Promptbreeder: Cria prompts através de um processo evolucionário.</a:t>
             </a:r>
             <a:endParaRPr/>
           </a:p>
           <a:p>
-            <a:pPr indent="-298450" lvl="1" marL="914400" rtl="0" algn="l">
-              <a:spcBef>
-                <a:spcPts val="0"/>
-              </a:spcBef>
-              <a:spcAft>
-                <a:spcPts val="0"/>
-              </a:spcAft>
-              <a:buSzPts val="1100"/>
-              <a:buChar char="-"/>
+            <a:pPr indent="0" lvl="0" marL="0" rtl="0" algn="l">
+              <a:spcBef>
+                <a:spcPts val="1200"/>
+              </a:spcBef>
+              <a:spcAft>
+                <a:spcPts val="1200"/>
+              </a:spcAft>
+              <a:buNone/>
             </a:pPr>
             <a:r>
               <a:rPr lang="pt-BR"/>
-              <a:t>Organize diferente</a:t>
-            </a:r>
-            <a:endParaRPr/>
-          </a:p>
-          <a:p>
-            <a:pPr indent="-311150" lvl="0" marL="457200" rtl="0" algn="l">
-              <a:spcBef>
-                <a:spcPts val="0"/>
-              </a:spcBef>
-              <a:spcAft>
-                <a:spcPts val="0"/>
-              </a:spcAft>
-              <a:buSzPts val="1300"/>
-              <a:buChar char="-"/>
-            </a:pPr>
-            <a:r>
-              <a:rPr lang="pt-BR"/>
-              <a:t>Estabeleça métricas padrões para comparar performance.</a:t>
-            </a:r>
-            <a:endParaRPr/>
-          </a:p>
-          <a:p>
-            <a:pPr indent="-311150" lvl="0" marL="457200" rtl="0" algn="l">
-              <a:spcBef>
-                <a:spcPts val="0"/>
-              </a:spcBef>
-              <a:spcAft>
-                <a:spcPts val="0"/>
-              </a:spcAft>
-              <a:buSzPts val="1300"/>
-              <a:buChar char="-"/>
-            </a:pPr>
-            <a:r>
-              <a:rPr lang="pt-BR"/>
-              <a:t>"Prompts devem ser avaliados em perspectiva de sistema, um prompt pode melhorar a performance de uma tarefa, mas piorar a performance do sistema."</a:t>
+              <a:t>IMPORTANTE: </a:t>
+            </a:r>
+            <a:br>
+              <a:rPr lang="pt-BR"/>
+            </a:br>
+            <a:r>
+              <a:rPr lang="pt-BR"/>
+              <a:t>Cuidado com custos utilizando IA para melhorar prompts. </a:t>
+            </a:r>
+            <a:br>
+              <a:rPr lang="pt-BR"/>
+            </a:br>
+            <a:r>
+              <a:rPr lang="pt-BR"/>
+              <a:t>Mantenha os prompts simples até que por necessidade eles exijam maior complexidade.</a:t>
             </a:r>
             <a:endParaRPr/>
           </a:p>
@@ -12698,7 +12628,7 @@
         </p:spPr>
         <p:txBody>
           <a:bodyPr anchorCtr="0" anchor="t" bIns="91425" lIns="91425" spcFirstLastPara="1" rIns="91425" wrap="square" tIns="91425">
-            <a:normAutofit fontScale="90000"/>
+            <a:normAutofit/>
           </a:bodyPr>
           <a:lstStyle/>
           <a:p>
@@ -12713,7 +12643,7 @@
             </a:pPr>
             <a:r>
               <a:rPr lang="pt-BR"/>
-              <a:t>Avalie ferramentas de engenharia de prompt</a:t>
+              <a:t>Organize e versione prompts</a:t>
             </a:r>
             <a:endParaRPr/>
           </a:p>
@@ -12742,88 +12672,104 @@
           </a:bodyPr>
           <a:lstStyle/>
           <a:p>
-            <a:pPr indent="0" lvl="0" marL="0" rtl="0" algn="l">
-              <a:spcBef>
-                <a:spcPts val="0"/>
-              </a:spcBef>
-              <a:spcAft>
-                <a:spcPts val="0"/>
-              </a:spcAft>
-              <a:buNone/>
+            <a:pPr indent="-311150" lvl="0" marL="457200" rtl="0" algn="l">
+              <a:spcBef>
+                <a:spcPts val="0"/>
+              </a:spcBef>
+              <a:spcAft>
+                <a:spcPts val="0"/>
+              </a:spcAft>
+              <a:buSzPts val="1300"/>
+              <a:buChar char="-"/>
             </a:pPr>
             <a:r>
               <a:rPr lang="pt-BR"/>
-              <a:t>Ferramentas que buscam otimizar prompts, buscam os prompts mais performáticos para realizar uma determinada tarefa a partir da especificação da entrada + saída que melhor se </a:t>
-            </a:r>
-            <a:r>
-              <a:rPr lang="pt-BR"/>
-              <a:t>adequa</a:t>
-            </a:r>
-            <a:r>
-              <a:rPr lang="pt-BR"/>
-              <a:t> a um determinado dataset de avaliação (Ex: OpenPrompt e DSPy).</a:t>
+              <a:t>Separe prompts do código da aplicação</a:t>
             </a:r>
             <a:endParaRPr/>
           </a:p>
           <a:p>
-            <a:pPr indent="0" lvl="0" marL="0" rtl="0" algn="l">
-              <a:spcBef>
-                <a:spcPts val="1200"/>
-              </a:spcBef>
-              <a:spcAft>
-                <a:spcPts val="0"/>
-              </a:spcAft>
-              <a:buNone/>
+            <a:pPr indent="-298450" lvl="1" marL="914400" rtl="0" algn="l">
+              <a:spcBef>
+                <a:spcPts val="0"/>
+              </a:spcBef>
+              <a:spcAft>
+                <a:spcPts val="0"/>
+              </a:spcAft>
+              <a:buSzPts val="1100"/>
+              <a:buChar char="-"/>
             </a:pPr>
             <a:r>
               <a:rPr lang="pt-BR"/>
-              <a:t>Outra forma de criar e otimizar prompts é utilizar o próprio modelo, solicitando que ele crie, otimize ou critique seu prompt.</a:t>
+              <a:t>Reusabilidade</a:t>
             </a:r>
             <a:endParaRPr/>
           </a:p>
           <a:p>
-            <a:pPr indent="0" lvl="0" marL="0" rtl="0" algn="l">
-              <a:spcBef>
-                <a:spcPts val="1200"/>
-              </a:spcBef>
-              <a:spcAft>
-                <a:spcPts val="0"/>
-              </a:spcAft>
-              <a:buNone/>
+            <a:pPr indent="-298450" lvl="1" marL="914400" rtl="0" algn="l">
+              <a:spcBef>
+                <a:spcPts val="0"/>
+              </a:spcBef>
+              <a:spcAft>
+                <a:spcPts val="0"/>
+              </a:spcAft>
+              <a:buSzPts val="1100"/>
+              <a:buChar char="-"/>
             </a:pPr>
             <a:r>
               <a:rPr lang="pt-BR"/>
-              <a:t>Deepmind Promptbreeder: Cria prompts através de um processo evolucionário.</a:t>
+              <a:t>Testabilidade</a:t>
             </a:r>
             <a:endParaRPr/>
           </a:p>
           <a:p>
-            <a:pPr indent="0" lvl="0" marL="0" rtl="0" algn="l">
-              <a:spcBef>
-                <a:spcPts val="1200"/>
-              </a:spcBef>
-              <a:spcAft>
-                <a:spcPts val="1200"/>
-              </a:spcAft>
-              <a:buNone/>
+            <a:pPr indent="-298450" lvl="1" marL="914400" rtl="0" algn="l">
+              <a:spcBef>
+                <a:spcPts val="0"/>
+              </a:spcBef>
+              <a:spcAft>
+                <a:spcPts val="0"/>
+              </a:spcAft>
+              <a:buSzPts val="1100"/>
+              <a:buChar char="-"/>
             </a:pPr>
             <a:r>
               <a:rPr lang="pt-BR"/>
-              <a:t>IMPORTANTE: </a:t>
-            </a:r>
-            <a:br>
-              <a:rPr lang="pt-BR"/>
-            </a:br>
-            <a:r>
-              <a:rPr lang="pt-BR"/>
-              <a:t>Cuidado com custos utilizando IA para melhorar prompts. </a:t>
-            </a:r>
-            <a:br>
-              <a:rPr lang="pt-BR"/>
-            </a:br>
-            <a:r>
-              <a:rPr lang="pt-BR"/>
-              <a:t>Mantenha os prompts simples até que por necessidade eles exijam maior complexidade.</a:t>
+              <a:t>Colaboração</a:t>
+            </a:r>
+            <a:endParaRPr/>
+          </a:p>
+          <a:p>
+            <a:pPr indent="-311150" lvl="0" marL="457200" rtl="0" algn="l">
+              <a:spcBef>
+                <a:spcPts val="0"/>
+              </a:spcBef>
+              <a:spcAft>
+                <a:spcPts val="0"/>
+              </a:spcAft>
+              <a:buSzPts val="1300"/>
+              <a:buChar char="-"/>
+            </a:pPr>
+            <a:r>
+              <a:rPr lang="pt-BR"/>
+              <a:t>Versione seus prompts e use metadados para especificar o uso</a:t>
+            </a:r>
+            <a:endParaRPr/>
+          </a:p>
+          <a:p>
+            <a:pPr indent="-311150" lvl="0" marL="457200" rtl="0" algn="l">
+              <a:spcBef>
+                <a:spcPts val="0"/>
+              </a:spcBef>
+              <a:spcAft>
+                <a:spcPts val="0"/>
+              </a:spcAft>
+              <a:buSzPts val="1300"/>
+              <a:buChar char="-"/>
+            </a:pPr>
+            <a:r>
+              <a:rPr lang="pt-BR"/>
+              <a:t>Utilizar ferramentas como git para controle de versão e catálogo de prompts</a:t>
             </a:r>
             <a:endParaRPr/>
           </a:p>
@@ -12888,7 +12834,7 @@
             </a:pPr>
             <a:r>
               <a:rPr lang="pt-BR"/>
-              <a:t>Organize e versione prompts</a:t>
+              <a:t>Engenharia de prompt defensivo</a:t>
             </a:r>
             <a:endParaRPr/>
           </a:p>
@@ -12917,9 +12863,25 @@
           </a:bodyPr>
           <a:lstStyle/>
           <a:p>
+            <a:pPr indent="0" lvl="0" marL="0" rtl="0" algn="l">
+              <a:spcBef>
+                <a:spcPts val="0"/>
+              </a:spcBef>
+              <a:spcAft>
+                <a:spcPts val="0"/>
+              </a:spcAft>
+              <a:buNone/>
+            </a:pPr>
+            <a:r>
+              <a:rPr lang="pt-BR"/>
+              <a:t>Principais ataques de prompt:</a:t>
+            </a:r>
+            <a:endParaRPr/>
+          </a:p>
+          <a:p>
             <a:pPr indent="-311150" lvl="0" marL="457200" rtl="0" algn="l">
               <a:spcBef>
-                <a:spcPts val="0"/>
+                <a:spcPts val="1200"/>
               </a:spcBef>
               <a:spcAft>
                 <a:spcPts val="0"/>
@@ -12928,61 +12890,10 @@
               <a:buChar char="-"/>
             </a:pPr>
             <a:r>
-              <a:rPr lang="pt-BR"/>
-              <a:t>Separe prompts do código da aplicação</a:t>
-            </a:r>
-            <a:endParaRPr/>
-          </a:p>
-          <a:p>
-            <a:pPr indent="-298450" lvl="1" marL="914400" rtl="0" algn="l">
-              <a:spcBef>
-                <a:spcPts val="0"/>
-              </a:spcBef>
-              <a:spcAft>
-                <a:spcPts val="0"/>
-              </a:spcAft>
-              <a:buSzPts val="1100"/>
-              <a:buChar char="-"/>
-            </a:pPr>
-            <a:r>
-              <a:rPr lang="pt-BR"/>
-              <a:t>Reusabilidade</a:t>
-            </a:r>
-            <a:endParaRPr/>
-          </a:p>
-          <a:p>
-            <a:pPr indent="-298450" lvl="1" marL="914400" rtl="0" algn="l">
-              <a:spcBef>
-                <a:spcPts val="0"/>
-              </a:spcBef>
-              <a:spcAft>
-                <a:spcPts val="0"/>
-              </a:spcAft>
-              <a:buSzPts val="1100"/>
-              <a:buChar char="-"/>
-            </a:pPr>
-            <a:r>
-              <a:rPr lang="pt-BR"/>
-              <a:t>Testabilidade</a:t>
-            </a:r>
-            <a:endParaRPr/>
-          </a:p>
-          <a:p>
-            <a:pPr indent="-298450" lvl="1" marL="914400" rtl="0" algn="l">
-              <a:spcBef>
-                <a:spcPts val="0"/>
-              </a:spcBef>
-              <a:spcAft>
-                <a:spcPts val="0"/>
-              </a:spcAft>
-              <a:buSzPts val="1100"/>
-              <a:buChar char="-"/>
-            </a:pPr>
-            <a:r>
-              <a:rPr lang="pt-BR"/>
-              <a:t>Colaboração</a:t>
-            </a:r>
-            <a:endParaRPr/>
+              <a:rPr i="1" lang="pt-BR"/>
+              <a:t>Prompt Extraction</a:t>
+            </a:r>
+            <a:endParaRPr i="1"/>
           </a:p>
           <a:p>
             <a:pPr indent="-311150" lvl="0" marL="457200" rtl="0" algn="l">
@@ -12996,10 +12907,10 @@
               <a:buChar char="-"/>
             </a:pPr>
             <a:r>
-              <a:rPr lang="pt-BR"/>
-              <a:t>Versione seus prompts e use metadados para especificar o uso</a:t>
-            </a:r>
-            <a:endParaRPr/>
+              <a:rPr i="1" lang="pt-BR"/>
+              <a:t>Jailbreaking</a:t>
+            </a:r>
+            <a:endParaRPr i="1"/>
           </a:p>
           <a:p>
             <a:pPr indent="-311150" lvl="0" marL="457200" rtl="0" algn="l">
@@ -13013,10 +12924,111 @@
               <a:buChar char="-"/>
             </a:pPr>
             <a:r>
-              <a:rPr lang="pt-BR"/>
-              <a:t>Utilizar ferramentas como git para controle de versão e catálogo de prompts</a:t>
+              <a:rPr i="1" lang="pt-BR"/>
+              <a:t>Information extraction</a:t>
+            </a:r>
+            <a:endParaRPr i="1"/>
+          </a:p>
+          <a:p>
+            <a:pPr indent="0" lvl="0" marL="0" rtl="0" algn="l">
+              <a:spcBef>
+                <a:spcPts val="1200"/>
+              </a:spcBef>
+              <a:spcAft>
+                <a:spcPts val="0"/>
+              </a:spcAft>
+              <a:buNone/>
+            </a:pPr>
+            <a:r>
+              <a:rPr lang="pt-BR"/>
+              <a:t>Riscos de ataques de prompt:</a:t>
             </a:r>
             <a:endParaRPr/>
+          </a:p>
+          <a:p>
+            <a:pPr indent="-311150" lvl="0" marL="457200" rtl="0" algn="l">
+              <a:spcBef>
+                <a:spcPts val="1200"/>
+              </a:spcBef>
+              <a:spcAft>
+                <a:spcPts val="0"/>
+              </a:spcAft>
+              <a:buSzPts val="1300"/>
+              <a:buChar char="-"/>
+            </a:pPr>
+            <a:r>
+              <a:rPr i="1" lang="pt-BR"/>
+              <a:t>Remote code or tool execution</a:t>
+            </a:r>
+            <a:endParaRPr i="1"/>
+          </a:p>
+          <a:p>
+            <a:pPr indent="-311150" lvl="0" marL="457200" rtl="0" algn="l">
+              <a:spcBef>
+                <a:spcPts val="0"/>
+              </a:spcBef>
+              <a:spcAft>
+                <a:spcPts val="0"/>
+              </a:spcAft>
+              <a:buSzPts val="1300"/>
+              <a:buChar char="-"/>
+            </a:pPr>
+            <a:r>
+              <a:rPr i="1" lang="pt-BR"/>
+              <a:t>Data leaks</a:t>
+            </a:r>
+            <a:endParaRPr i="1"/>
+          </a:p>
+          <a:p>
+            <a:pPr indent="-311150" lvl="0" marL="457200" rtl="0" algn="l">
+              <a:spcBef>
+                <a:spcPts val="0"/>
+              </a:spcBef>
+              <a:spcAft>
+                <a:spcPts val="0"/>
+              </a:spcAft>
+              <a:buSzPts val="1300"/>
+              <a:buChar char="-"/>
+            </a:pPr>
+            <a:r>
+              <a:rPr i="1" lang="pt-BR"/>
+              <a:t>Misinformation</a:t>
+            </a:r>
+            <a:endParaRPr i="1"/>
+          </a:p>
+          <a:p>
+            <a:pPr indent="-311150" lvl="0" marL="457200" rtl="0" algn="l">
+              <a:spcBef>
+                <a:spcPts val="0"/>
+              </a:spcBef>
+              <a:spcAft>
+                <a:spcPts val="0"/>
+              </a:spcAft>
+              <a:buSzPts val="1300"/>
+              <a:buChar char="-"/>
+            </a:pPr>
+            <a:r>
+              <a:rPr i="1" lang="pt-BR"/>
+              <a:t>Service interruption</a:t>
+            </a:r>
+            <a:endParaRPr i="1"/>
+          </a:p>
+          <a:p>
+            <a:pPr indent="-311150" lvl="0" marL="457200" rtl="0" algn="l">
+              <a:spcBef>
+                <a:spcPts val="0"/>
+              </a:spcBef>
+              <a:spcAft>
+                <a:spcPts val="0"/>
+              </a:spcAft>
+              <a:buSzPts val="1300"/>
+              <a:buChar char="-"/>
+            </a:pPr>
+            <a:r>
+              <a:rPr i="1" lang="pt-BR"/>
+              <a:t>Brand risk </a:t>
+            </a:r>
+            <a:endParaRPr i="1"/>
           </a:p>
         </p:txBody>
       </p:sp>
@@ -13079,7 +13091,7 @@
             </a:pPr>
             <a:r>
               <a:rPr lang="pt-BR"/>
-              <a:t>Engenharia de prompt defensivo</a:t>
+              <a:t>Engenharia reversa de prompts</a:t>
             </a:r>
             <a:endParaRPr/>
           </a:p>
@@ -13119,161 +13131,41 @@
             </a:pPr>
             <a:r>
               <a:rPr lang="pt-BR"/>
-              <a:t>Principais ataques de prompt:</a:t>
+              <a:t>A dificuldade para criar um prompt torna este um recurso valioso. </a:t>
             </a:r>
             <a:endParaRPr/>
           </a:p>
           <a:p>
-            <a:pPr indent="-311150" lvl="0" marL="457200" rtl="0" algn="l">
+            <a:pPr indent="0" lvl="0" marL="0" rtl="0" algn="l">
               <a:spcBef>
                 <a:spcPts val="1200"/>
               </a:spcBef>
               <a:spcAft>
                 <a:spcPts val="0"/>
               </a:spcAft>
-              <a:buSzPts val="1300"/>
-              <a:buChar char="-"/>
+              <a:buNone/>
             </a:pPr>
             <a:r>
-              <a:rPr i="1" lang="pt-BR"/>
-              <a:t>Prompt Extraction</a:t>
-            </a:r>
-            <a:endParaRPr i="1"/>
-          </a:p>
-          <a:p>
-            <a:pPr indent="-311150" lvl="0" marL="457200" rtl="0" algn="l">
-              <a:spcBef>
-                <a:spcPts val="0"/>
-              </a:spcBef>
-              <a:spcAft>
-                <a:spcPts val="0"/>
-              </a:spcAft>
-              <a:buSzPts val="1300"/>
-              <a:buChar char="-"/>
+              <a:rPr lang="pt-BR"/>
+              <a:t>Engenharia reversa de prompt é o processo de descobrir o prompt de sistema da aplicação, com o intuito de revender ou manipular de maneira indevida.</a:t>
+            </a:r>
+            <a:endParaRPr/>
+          </a:p>
+          <a:p>
+            <a:pPr indent="0" lvl="0" marL="0" rtl="0" algn="l">
+              <a:spcBef>
+                <a:spcPts val="1200"/>
+              </a:spcBef>
+              <a:spcAft>
+                <a:spcPts val="1200"/>
+              </a:spcAft>
+              <a:buNone/>
             </a:pPr>
             <a:r>
-              <a:rPr i="1" lang="pt-BR"/>
-              <a:t>Jailbreaking</a:t>
-            </a:r>
-            <a:endParaRPr i="1"/>
-          </a:p>
-          <a:p>
-            <a:pPr indent="-311150" lvl="0" marL="457200" rtl="0" algn="l">
-              <a:spcBef>
-                <a:spcPts val="0"/>
-              </a:spcBef>
-              <a:spcAft>
-                <a:spcPts val="0"/>
-              </a:spcAft>
-              <a:buSzPts val="1300"/>
-              <a:buChar char="-"/>
-            </a:pPr>
-            <a:r>
-              <a:rPr i="1" lang="pt-BR"/>
-              <a:t>Information extraction</a:t>
-            </a:r>
-            <a:endParaRPr i="1"/>
-          </a:p>
-          <a:p>
-            <a:pPr indent="0" lvl="0" marL="0" rtl="0" algn="l">
-              <a:spcBef>
-                <a:spcPts val="1200"/>
-              </a:spcBef>
-              <a:spcAft>
-                <a:spcPts val="0"/>
-              </a:spcAft>
-              <a:buNone/>
-            </a:pPr>
-            <a:r>
-              <a:rPr lang="pt-BR"/>
-              <a:t>Riscos de ataques de prompt:</a:t>
+              <a:rPr lang="pt-BR"/>
+              <a:t>Consiste em analisar a saída do modelo ou enganar o modelo para que ele revele seu prompt de sistema.</a:t>
             </a:r>
             <a:endParaRPr/>
-          </a:p>
-          <a:p>
-            <a:pPr indent="-311150" lvl="0" marL="457200" rtl="0" algn="l">
-              <a:spcBef>
-                <a:spcPts val="1200"/>
-              </a:spcBef>
-              <a:spcAft>
-                <a:spcPts val="0"/>
-              </a:spcAft>
-              <a:buSzPts val="1300"/>
-              <a:buChar char="-"/>
-            </a:pPr>
-            <a:r>
-              <a:rPr i="1" lang="pt-BR"/>
-              <a:t>Remote code or tool execution</a:t>
-            </a:r>
-            <a:endParaRPr i="1"/>
-          </a:p>
-          <a:p>
-            <a:pPr indent="-311150" lvl="0" marL="457200" rtl="0" algn="l">
-              <a:spcBef>
-                <a:spcPts val="0"/>
-              </a:spcBef>
-              <a:spcAft>
-                <a:spcPts val="0"/>
-              </a:spcAft>
-              <a:buSzPts val="1300"/>
-              <a:buChar char="-"/>
-            </a:pPr>
-            <a:r>
-              <a:rPr i="1" lang="pt-BR"/>
-              <a:t>Data leaks</a:t>
-            </a:r>
-            <a:endParaRPr i="1"/>
-          </a:p>
-          <a:p>
-            <a:pPr indent="-311150" lvl="0" marL="457200" rtl="0" algn="l">
-              <a:spcBef>
-                <a:spcPts val="0"/>
-              </a:spcBef>
-              <a:spcAft>
-                <a:spcPts val="0"/>
-              </a:spcAft>
-              <a:buSzPts val="1300"/>
-              <a:buChar char="-"/>
-            </a:pPr>
-            <a:r>
-              <a:rPr i="1" lang="pt-BR"/>
-              <a:t>Misinformation</a:t>
-            </a:r>
-            <a:endParaRPr i="1"/>
-          </a:p>
-          <a:p>
-            <a:pPr indent="-311150" lvl="0" marL="457200" rtl="0" algn="l">
-              <a:spcBef>
-                <a:spcPts val="0"/>
-              </a:spcBef>
-              <a:spcAft>
-                <a:spcPts val="0"/>
-              </a:spcAft>
-              <a:buSzPts val="1300"/>
-              <a:buChar char="-"/>
-            </a:pPr>
-            <a:r>
-              <a:rPr i="1" lang="pt-BR"/>
-              <a:t>Service interruption</a:t>
-            </a:r>
-            <a:endParaRPr i="1"/>
-          </a:p>
-          <a:p>
-            <a:pPr indent="-311150" lvl="0" marL="457200" rtl="0" algn="l">
-              <a:spcBef>
-                <a:spcPts val="0"/>
-              </a:spcBef>
-              <a:spcAft>
-                <a:spcPts val="0"/>
-              </a:spcAft>
-              <a:buSzPts val="1300"/>
-              <a:buChar char="-"/>
-            </a:pPr>
-            <a:r>
-              <a:rPr i="1" lang="pt-BR"/>
-              <a:t>Brand risk </a:t>
-            </a:r>
-            <a:endParaRPr i="1"/>
           </a:p>
         </p:txBody>
       </p:sp>
@@ -13427,7 +13319,7 @@
             </a:pPr>
             <a:r>
               <a:rPr lang="pt-BR"/>
-              <a:t>Prompts defensivos e técnicas de defesa.</a:t>
+              <a:t>Engenharia de prompt defensiva.</a:t>
             </a:r>
             <a:endParaRPr/>
           </a:p>
@@ -13491,10 +13383,18 @@
               <a:buNone/>
             </a:pPr>
             <a:r>
-              <a:rPr lang="pt-BR"/>
-              <a:t>Engenharia reversa de prompts</a:t>
-            </a:r>
-            <a:endParaRPr/>
+              <a:rPr i="1" lang="pt-BR"/>
+              <a:t>Jailbreaking</a:t>
+            </a:r>
+            <a:r>
+              <a:rPr lang="pt-BR"/>
+              <a:t> e </a:t>
+            </a:r>
+            <a:r>
+              <a:rPr i="1" lang="pt-BR"/>
+              <a:t>Prompt Injection</a:t>
+            </a:r>
+            <a:endParaRPr i="1"/>
           </a:p>
         </p:txBody>
       </p:sp>
@@ -13532,7 +13432,15 @@
             </a:pPr>
             <a:r>
               <a:rPr lang="pt-BR"/>
-              <a:t>A dificuldade para criar um prompt torna este um recurso valioso. </a:t>
+              <a:t>"</a:t>
+            </a:r>
+            <a:r>
+              <a:rPr i="1" lang="pt-BR"/>
+              <a:t>Jailbreaking </a:t>
+            </a:r>
+            <a:r>
+              <a:rPr lang="pt-BR"/>
+              <a:t>consiste em burlar funcionalidades de segurança do modelo."</a:t>
             </a:r>
             <a:endParaRPr/>
           </a:p>
@@ -13548,7 +13456,15 @@
             </a:pPr>
             <a:r>
               <a:rPr lang="pt-BR"/>
-              <a:t>Engenharia reversa de prompt é o processo de descobrir o prompt de sistema da aplicação, com o intuito de revender ou manipular de maneira indevida.</a:t>
+              <a:t>"</a:t>
+            </a:r>
+            <a:r>
+              <a:rPr i="1" lang="pt-BR"/>
+              <a:t>Prompt Injection</a:t>
+            </a:r>
+            <a:r>
+              <a:rPr lang="pt-BR"/>
+              <a:t> refere-se a um tipo de ataque onde instruções maliciosas são injetadas no prompt"</a:t>
             </a:r>
             <a:endParaRPr/>
           </a:p>
@@ -13558,15 +13474,66 @@
                 <a:spcPts val="1200"/>
               </a:spcBef>
               <a:spcAft>
+                <a:spcPts val="0"/>
+              </a:spcAft>
+              <a:buNone/>
+            </a:pPr>
+            <a:r>
+              <a:rPr lang="pt-BR"/>
+              <a:t>Formas de ataque:</a:t>
+            </a:r>
+            <a:endParaRPr/>
+          </a:p>
+          <a:p>
+            <a:pPr indent="-311150" lvl="0" marL="457200" rtl="0" algn="l">
+              <a:spcBef>
                 <a:spcPts val="1200"/>
-              </a:spcAft>
-              <a:buNone/>
+              </a:spcBef>
+              <a:spcAft>
+                <a:spcPts val="0"/>
+              </a:spcAft>
+              <a:buSzPts val="1300"/>
+              <a:buChar char="-"/>
             </a:pPr>
             <a:r>
-              <a:rPr lang="pt-BR"/>
-              <a:t>Consiste em analisar a saída do modelo ou enganar o modelo para que ele revele seu prompt de sistema.</a:t>
-            </a:r>
-            <a:endParaRPr/>
+              <a:rPr i="1" lang="pt-BR"/>
+              <a:t>Direct manual prompt hacking</a:t>
+            </a:r>
+            <a:endParaRPr i="1"/>
+          </a:p>
+          <a:p>
+            <a:pPr indent="-311150" lvl="0" marL="457200" rtl="0" algn="l">
+              <a:spcBef>
+                <a:spcPts val="0"/>
+              </a:spcBef>
+              <a:spcAft>
+                <a:spcPts val="0"/>
+              </a:spcAft>
+              <a:buSzPts val="1300"/>
+              <a:buChar char="-"/>
+            </a:pPr>
+            <a:r>
+              <a:rPr i="1" lang="pt-BR"/>
+              <a:t>Automated attacks</a:t>
+            </a:r>
+            <a:endParaRPr i="1"/>
+          </a:p>
+          <a:p>
+            <a:pPr indent="-311150" lvl="0" marL="457200" rtl="0" algn="l">
+              <a:spcBef>
+                <a:spcPts val="0"/>
+              </a:spcBef>
+              <a:spcAft>
+                <a:spcPts val="0"/>
+              </a:spcAft>
+              <a:buSzPts val="1300"/>
+              <a:buChar char="-"/>
+            </a:pPr>
+            <a:r>
+              <a:rPr i="1" lang="pt-BR"/>
+              <a:t>Indirect prompt injection</a:t>
+            </a:r>
+            <a:endParaRPr i="1"/>
           </a:p>
         </p:txBody>
       </p:sp>
@@ -13628,18 +13595,10 @@
               <a:buNone/>
             </a:pPr>
             <a:r>
-              <a:rPr i="1" lang="pt-BR"/>
-              <a:t>Jailbreaking</a:t>
-            </a:r>
-            <a:r>
-              <a:rPr lang="pt-BR"/>
-              <a:t> e </a:t>
-            </a:r>
-            <a:r>
-              <a:rPr i="1" lang="pt-BR"/>
-              <a:t>Prompt Injection</a:t>
-            </a:r>
-            <a:endParaRPr i="1"/>
+              <a:rPr lang="pt-BR"/>
+              <a:t>Information Extraction</a:t>
+            </a:r>
+            <a:endParaRPr/>
           </a:p>
         </p:txBody>
       </p:sp>
@@ -13676,56 +13635,12 @@
               <a:buNone/>
             </a:pPr>
             <a:r>
-              <a:rPr lang="pt-BR"/>
-              <a:t>"</a:t>
-            </a:r>
-            <a:r>
               <a:rPr i="1" lang="pt-BR"/>
-              <a:t>Jailbreaking </a:t>
-            </a:r>
-            <a:r>
-              <a:rPr lang="pt-BR"/>
-              <a:t>consiste em burlar funcionalidades de segurança do modelo."</a:t>
-            </a:r>
-            <a:endParaRPr/>
-          </a:p>
-          <a:p>
-            <a:pPr indent="0" lvl="0" marL="0" rtl="0" algn="l">
-              <a:spcBef>
-                <a:spcPts val="1200"/>
-              </a:spcBef>
-              <a:spcAft>
-                <a:spcPts val="0"/>
-              </a:spcAft>
-              <a:buNone/>
-            </a:pPr>
-            <a:r>
-              <a:rPr lang="pt-BR"/>
-              <a:t>"</a:t>
-            </a:r>
-            <a:r>
-              <a:rPr i="1" lang="pt-BR"/>
-              <a:t>Prompt Injection</a:t>
-            </a:r>
-            <a:r>
-              <a:rPr lang="pt-BR"/>
-              <a:t> refere-se a um tipo de ataque onde instruções maliciosas são injetadas no prompt"</a:t>
-            </a:r>
-            <a:endParaRPr/>
-          </a:p>
-          <a:p>
-            <a:pPr indent="0" lvl="0" marL="0" rtl="0" algn="l">
-              <a:spcBef>
-                <a:spcPts val="1200"/>
-              </a:spcBef>
-              <a:spcAft>
-                <a:spcPts val="0"/>
-              </a:spcAft>
-              <a:buNone/>
-            </a:pPr>
-            <a:r>
-              <a:rPr lang="pt-BR"/>
-              <a:t>Formas de ataque:</a:t>
+              <a:t>Information Extraction</a:t>
+            </a:r>
+            <a:r>
+              <a:rPr lang="pt-BR"/>
+              <a:t> busca descobrir as informações que o modelo foi treinado ou o seu acesso à informação, exemplos de extração:</a:t>
             </a:r>
             <a:endParaRPr/>
           </a:p>
@@ -13742,7 +13657,7 @@
             </a:pPr>
             <a:r>
               <a:rPr i="1" lang="pt-BR"/>
-              <a:t>Direct manual prompt hacking</a:t>
+              <a:t>Data leak</a:t>
             </a:r>
             <a:endParaRPr i="1"/>
           </a:p>
@@ -13759,7 +13674,7 @@
             </a:pPr>
             <a:r>
               <a:rPr i="1" lang="pt-BR"/>
-              <a:t>Automated attacks</a:t>
+              <a:t>Privacy violation</a:t>
             </a:r>
             <a:endParaRPr i="1"/>
           </a:p>
@@ -13776,9 +13691,52 @@
             </a:pPr>
             <a:r>
               <a:rPr i="1" lang="pt-BR"/>
-              <a:t>Indirect prompt injection</a:t>
-            </a:r>
-            <a:endParaRPr i="1"/>
+              <a:t>Copyright infringement</a:t>
+            </a:r>
+            <a:endParaRPr/>
+          </a:p>
+          <a:p>
+            <a:pPr indent="0" lvl="0" marL="0" rtl="0" algn="l">
+              <a:spcBef>
+                <a:spcPts val="1200"/>
+              </a:spcBef>
+              <a:spcAft>
+                <a:spcPts val="0"/>
+              </a:spcAft>
+              <a:buNone/>
+            </a:pPr>
+            <a:r>
+              <a:rPr lang="pt-BR"/>
+              <a:t>O modelo "</a:t>
+            </a:r>
+            <a:r>
+              <a:rPr i="1" lang="pt-BR"/>
+              <a:t>memoriza"</a:t>
+            </a:r>
+            <a:r>
+              <a:rPr lang="pt-BR"/>
+              <a:t> algumas informações.</a:t>
+            </a:r>
+            <a:endParaRPr/>
+          </a:p>
+          <a:p>
+            <a:pPr indent="0" lvl="0" marL="0" rtl="0" algn="l">
+              <a:spcBef>
+                <a:spcPts val="1200"/>
+              </a:spcBef>
+              <a:spcAft>
+                <a:spcPts val="1200"/>
+              </a:spcAft>
+              <a:buNone/>
+            </a:pPr>
+            <a:r>
+              <a:rPr lang="pt-BR"/>
+              <a:t>"As mesmas técnicas utilizadas para avaliar o conhecimento de um modelo podem ser utilizadas para extrair informações sensíveis"</a:t>
+            </a:r>
+            <a:br>
+              <a:rPr lang="pt-BR"/>
+            </a:br>
+            <a:endParaRPr/>
           </a:p>
         </p:txBody>
       </p:sp>
@@ -13841,7 +13799,7 @@
             </a:pPr>
             <a:r>
               <a:rPr lang="pt-BR"/>
-              <a:t>Information Extraction</a:t>
+              <a:t>Defesas contra ataques de prompts</a:t>
             </a:r>
             <a:endParaRPr/>
           </a:p>
@@ -13850,209 +13808,6 @@
       <p:sp>
         <p:nvSpPr>
           <p:cNvPr id="260" name="Google Shape;260;p34"/>
-          <p:cNvSpPr txBox="1"/>
-          <p:nvPr>
-            <p:ph idx="1" type="body"/>
-          </p:nvPr>
-        </p:nvSpPr>
-        <p:spPr>
-          <a:xfrm>
-            <a:off x="1297500" y="1567550"/>
-            <a:ext cx="7038900" cy="2911200"/>
-          </a:xfrm>
-          <a:prstGeom prst="rect">
-            <a:avLst/>
-          </a:prstGeom>
-        </p:spPr>
-        <p:txBody>
-          <a:bodyPr anchorCtr="0" anchor="t" bIns="91425" lIns="91425" spcFirstLastPara="1" rIns="91425" wrap="square" tIns="91425">
-            <a:normAutofit/>
-          </a:bodyPr>
-          <a:lstStyle/>
-          <a:p>
-            <a:pPr indent="0" lvl="0" marL="0" rtl="0" algn="l">
-              <a:spcBef>
-                <a:spcPts val="0"/>
-              </a:spcBef>
-              <a:spcAft>
-                <a:spcPts val="0"/>
-              </a:spcAft>
-              <a:buNone/>
-            </a:pPr>
-            <a:r>
-              <a:rPr i="1" lang="pt-BR"/>
-              <a:t>Information Extraction</a:t>
-            </a:r>
-            <a:r>
-              <a:rPr lang="pt-BR"/>
-              <a:t> busca descobrir as informações que o modelo foi treinado ou o seu acesso à informação, exemplos de extração:</a:t>
-            </a:r>
-            <a:endParaRPr/>
-          </a:p>
-          <a:p>
-            <a:pPr indent="-311150" lvl="0" marL="457200" rtl="0" algn="l">
-              <a:spcBef>
-                <a:spcPts val="1200"/>
-              </a:spcBef>
-              <a:spcAft>
-                <a:spcPts val="0"/>
-              </a:spcAft>
-              <a:buSzPts val="1300"/>
-              <a:buChar char="-"/>
-            </a:pPr>
-            <a:r>
-              <a:rPr i="1" lang="pt-BR"/>
-              <a:t>Data leak</a:t>
-            </a:r>
-            <a:endParaRPr i="1"/>
-          </a:p>
-          <a:p>
-            <a:pPr indent="-311150" lvl="0" marL="457200" rtl="0" algn="l">
-              <a:spcBef>
-                <a:spcPts val="0"/>
-              </a:spcBef>
-              <a:spcAft>
-                <a:spcPts val="0"/>
-              </a:spcAft>
-              <a:buSzPts val="1300"/>
-              <a:buChar char="-"/>
-            </a:pPr>
-            <a:r>
-              <a:rPr i="1" lang="pt-BR"/>
-              <a:t>Privacy violation</a:t>
-            </a:r>
-            <a:endParaRPr i="1"/>
-          </a:p>
-          <a:p>
-            <a:pPr indent="-311150" lvl="0" marL="457200" rtl="0" algn="l">
-              <a:spcBef>
-                <a:spcPts val="0"/>
-              </a:spcBef>
-              <a:spcAft>
-                <a:spcPts val="0"/>
-              </a:spcAft>
-              <a:buSzPts val="1300"/>
-              <a:buChar char="-"/>
-            </a:pPr>
-            <a:r>
-              <a:rPr i="1" lang="pt-BR"/>
-              <a:t>Copyright infringement</a:t>
-            </a:r>
-            <a:endParaRPr/>
-          </a:p>
-          <a:p>
-            <a:pPr indent="0" lvl="0" marL="0" rtl="0" algn="l">
-              <a:spcBef>
-                <a:spcPts val="1200"/>
-              </a:spcBef>
-              <a:spcAft>
-                <a:spcPts val="0"/>
-              </a:spcAft>
-              <a:buNone/>
-            </a:pPr>
-            <a:r>
-              <a:rPr lang="pt-BR"/>
-              <a:t>O modelo "</a:t>
-            </a:r>
-            <a:r>
-              <a:rPr i="1" lang="pt-BR"/>
-              <a:t>memoriza"</a:t>
-            </a:r>
-            <a:r>
-              <a:rPr lang="pt-BR"/>
-              <a:t> algumas informações.</a:t>
-            </a:r>
-            <a:endParaRPr/>
-          </a:p>
-          <a:p>
-            <a:pPr indent="0" lvl="0" marL="0" rtl="0" algn="l">
-              <a:spcBef>
-                <a:spcPts val="1200"/>
-              </a:spcBef>
-              <a:spcAft>
-                <a:spcPts val="1200"/>
-              </a:spcAft>
-              <a:buNone/>
-            </a:pPr>
-            <a:r>
-              <a:rPr lang="pt-BR"/>
-              <a:t>"As mesmas técnicas utilizadas para avaliar o conhecimento de um modelo podem ser utilizadas para extrair informações sensíveis"</a:t>
-            </a:r>
-            <a:br>
-              <a:rPr lang="pt-BR"/>
-            </a:br>
-            <a:endParaRPr/>
-          </a:p>
-        </p:txBody>
-      </p:sp>
-    </p:spTree>
-  </p:cSld>
-  <p:clrMapOvr>
-    <a:masterClrMapping/>
-  </p:clrMapOvr>
-</p:sld>
-</file>
-
-<file path=ppt/slides/slide23.xml><?xml version="1.0" encoding="utf-8"?>
-<p:sld xmlns:a="http://schemas.openxmlformats.org/drawingml/2006/main" xmlns:r="http://schemas.openxmlformats.org/officeDocument/2006/relationships" xmlns:mc="http://schemas.openxmlformats.org/markup-compatibility/2006" xmlns:mv="urn:schemas-microsoft-com:mac:vml" xmlns:p="http://schemas.openxmlformats.org/presentationml/2006/main" xmlns:c="http://schemas.openxmlformats.org/drawingml/2006/chart" xmlns:dgm="http://schemas.openxmlformats.org/drawingml/2006/diagram" xmlns:o="urn:schemas-microsoft-com:office:office" xmlns:v="urn:schemas-microsoft-com:vml" xmlns:pvml="urn:schemas-microsoft-com:office:powerpoint" xmlns:com="http://schemas.openxmlformats.org/drawingml/2006/compatibility" xmlns:p14="http://schemas.microsoft.com/office/powerpoint/2010/main" xmlns:p15="http://schemas.microsoft.com/office/powerpoint/2012/main" xmlns:ahyp="http://schemas.microsoft.com/office/drawing/2018/hyperlinkcolor">
-  <p:cSld>
-    <p:spTree>
-      <p:nvGrpSpPr>
-        <p:cNvPr id="264" name="Shape 264"/>
-        <p:cNvGrpSpPr/>
-        <p:nvPr/>
-      </p:nvGrpSpPr>
-      <p:grpSpPr>
-        <a:xfrm>
-          <a:off x="0" y="0"/>
-          <a:ext cx="0" cy="0"/>
-          <a:chOff x="0" y="0"/>
-          <a:chExt cx="0" cy="0"/>
-        </a:xfrm>
-      </p:grpSpPr>
-      <p:sp>
-        <p:nvSpPr>
-          <p:cNvPr id="265" name="Google Shape;265;p35"/>
-          <p:cNvSpPr txBox="1"/>
-          <p:nvPr>
-            <p:ph type="title"/>
-          </p:nvPr>
-        </p:nvSpPr>
-        <p:spPr>
-          <a:xfrm>
-            <a:off x="1297500" y="393750"/>
-            <a:ext cx="7038900" cy="914100"/>
-          </a:xfrm>
-          <a:prstGeom prst="rect">
-            <a:avLst/>
-          </a:prstGeom>
-        </p:spPr>
-        <p:txBody>
-          <a:bodyPr anchorCtr="0" anchor="t" bIns="91425" lIns="91425" spcFirstLastPara="1" rIns="91425" wrap="square" tIns="91425">
-            <a:normAutofit/>
-          </a:bodyPr>
-          <a:lstStyle/>
-          <a:p>
-            <a:pPr indent="0" lvl="0" marL="0" rtl="0" algn="l">
-              <a:spcBef>
-                <a:spcPts val="0"/>
-              </a:spcBef>
-              <a:spcAft>
-                <a:spcPts val="0"/>
-              </a:spcAft>
-              <a:buNone/>
-            </a:pPr>
-            <a:r>
-              <a:rPr lang="pt-BR"/>
-              <a:t>Defesas contra ataques de prompts</a:t>
-            </a:r>
-            <a:endParaRPr/>
-          </a:p>
-        </p:txBody>
-      </p:sp>
-      <p:sp>
-        <p:nvSpPr>
-          <p:cNvPr id="266" name="Google Shape;266;p35"/>
           <p:cNvSpPr txBox="1"/>
           <p:nvPr>
             <p:ph idx="1" type="body"/>
@@ -15282,6 +15037,16 @@
             <a:r>
               <a:rPr lang="pt-BR"/>
               <a:t>"Pesquisas mostram que modelos são melhores no entendimento de instruções no início e no fim de um prompt"</a:t>
+            </a:r>
+            <a:br>
+              <a:rPr lang="pt-BR"/>
+            </a:br>
+            <a:br>
+              <a:rPr lang="pt-BR"/>
+            </a:br>
+            <a:r>
+              <a:rPr lang="pt-BR"/>
+              <a:t>"Se um contexto maior causa perda de performance, tente reduzir o seu prompt"</a:t>
             </a:r>
             <a:endParaRPr/>
           </a:p>
